--- a/UNIDAD 4/Act-4.3 - LYAI1-Ejercicios de análisis léxico-amaury Gordillo.pptx
+++ b/UNIDAD 4/Act-4.3 - LYAI1-Ejercicios de análisis léxico-amaury Gordillo.pptx
@@ -5,7 +5,7 @@
     <p:sldMasterId id="2147483648" r:id="rId1"/>
   </p:sldMasterIdLst>
   <p:notesMasterIdLst>
-    <p:notesMasterId r:id="rId12"/>
+    <p:notesMasterId r:id="rId13"/>
   </p:notesMasterIdLst>
   <p:sldIdLst>
     <p:sldId id="256" r:id="rId2"/>
@@ -16,35 +16,36 @@
     <p:sldId id="261" r:id="rId7"/>
     <p:sldId id="262" r:id="rId8"/>
     <p:sldId id="263" r:id="rId9"/>
-    <p:sldId id="264" r:id="rId10"/>
-    <p:sldId id="265" r:id="rId11"/>
+    <p:sldId id="266" r:id="rId10"/>
+    <p:sldId id="264" r:id="rId11"/>
+    <p:sldId id="265" r:id="rId12"/>
   </p:sldIdLst>
   <p:sldSz cx="18288000" cy="10287000"/>
   <p:notesSz cx="6858000" cy="9144000"/>
   <p:embeddedFontLst>
     <p:embeddedFont>
       <p:font typeface="Arimo" panose="020B0604020202020204" charset="0"/>
-      <p:regular r:id="rId13"/>
+      <p:regular r:id="rId14"/>
     </p:embeddedFont>
     <p:embeddedFont>
       <p:font typeface="Arimo Bold" panose="020B0604020202020204" charset="0"/>
-      <p:regular r:id="rId14"/>
+      <p:regular r:id="rId15"/>
     </p:embeddedFont>
     <p:embeddedFont>
       <p:font typeface="Arimo Italics" panose="020B0604020202020204" charset="0"/>
-      <p:regular r:id="rId15"/>
+      <p:regular r:id="rId16"/>
     </p:embeddedFont>
     <p:embeddedFont>
       <p:font typeface="Consolas" panose="020B0609020204030204" pitchFamily="49" charset="0"/>
-      <p:regular r:id="rId16"/>
-      <p:bold r:id="rId17"/>
-      <p:italic r:id="rId18"/>
-      <p:boldItalic r:id="rId19"/>
+      <p:regular r:id="rId17"/>
+      <p:bold r:id="rId18"/>
+      <p:italic r:id="rId19"/>
+      <p:boldItalic r:id="rId20"/>
     </p:embeddedFont>
     <p:embeddedFont>
       <p:font typeface="Montserrat Bold" panose="00000800000000000000" pitchFamily="2" charset="0"/>
-      <p:regular r:id="rId20"/>
-      <p:bold r:id="rId21"/>
+      <p:regular r:id="rId21"/>
+      <p:bold r:id="rId22"/>
     </p:embeddedFont>
   </p:embeddedFontLst>
   <p:defaultTextStyle>
@@ -243,7 +244,7 @@
           <a:p>
             <a:fld id="{B7268E1E-0E44-426D-905E-8AD9B19D2182}" type="datetimeFigureOut">
               <a:rPr lang="cs-CZ" smtClean="0"/>
-              <a:t>15.03.2026</a:t>
+              <a:t>18.03.2026</a:t>
             </a:fld>
             <a:endParaRPr lang="cs-CZ"/>
           </a:p>
@@ -823,8 +824,226 @@
         </p:nvSpPr>
         <p:spPr>
           <a:xfrm>
-            <a:off x="2857500" y="512763"/>
-            <a:ext cx="3429000" cy="2566987"/>
+            <a:off x="2290763" y="512763"/>
+            <a:ext cx="4562475" cy="2566987"/>
+          </a:xfrm>
+          <a:prstGeom prst="rect">
+            <a:avLst/>
+          </a:prstGeom>
+          <a:noFill/>
+          <a:ln w="12700">
+            <a:solidFill>
+              <a:prstClr val="black"/>
+            </a:solidFill>
+          </a:ln>
+        </p:spPr>
+        <p:txBody>
+          <a:bodyPr vert="horz" lIns="91440" tIns="45720" rIns="91440" bIns="45720" rtlCol="0" anchor="ctr"/>
+          <a:lstStyle/>
+          <a:p>
+            <a:endParaRPr/>
+          </a:p>
+        </p:txBody>
+      </p:sp>
+      <p:sp>
+        <p:nvSpPr>
+          <p:cNvPr id="5" name="Notes Placeholder 4"/>
+          <p:cNvSpPr>
+            <a:spLocks noGrp="1"/>
+          </p:cNvSpPr>
+          <p:nvPr>
+            <p:ph type="body" sz="quarter" idx="3"/>
+          </p:nvPr>
+        </p:nvSpPr>
+        <p:spPr>
+          <a:xfrm>
+            <a:off x="914400" y="3251200"/>
+            <a:ext cx="7315200" cy="3081338"/>
+          </a:xfrm>
+          <a:prstGeom prst="rect">
+            <a:avLst/>
+          </a:prstGeom>
+        </p:spPr>
+        <p:txBody>
+          <a:bodyPr vert="horz" lIns="91440" tIns="45720" rIns="91440" bIns="45720" rtlCol="0"/>
+          <a:lstStyle/>
+          <a:p>
+            <a:r>
+              <a:rPr lang="en-US"/>
+              <a:t>9</a:t>
+            </a:r>
+          </a:p>
+        </p:txBody>
+      </p:sp>
+      <p:sp>
+        <p:nvSpPr>
+          <p:cNvPr id="6" name="Footer Placeholder 5"/>
+          <p:cNvSpPr>
+            <a:spLocks noGrp="1"/>
+          </p:cNvSpPr>
+          <p:nvPr>
+            <p:ph type="ftr" sz="quarter" idx="4"/>
+          </p:nvPr>
+        </p:nvSpPr>
+        <p:spPr>
+          <a:xfrm>
+            <a:off x="0" y="6502400"/>
+            <a:ext cx="3962400" cy="341313"/>
+          </a:xfrm>
+          <a:prstGeom prst="rect">
+            <a:avLst/>
+          </a:prstGeom>
+        </p:spPr>
+        <p:txBody>
+          <a:bodyPr vert="horz" lIns="91440" tIns="45720" rIns="91440" bIns="45720" rtlCol="0" anchor="b"/>
+          <a:lstStyle>
+            <a:lvl1pPr algn="l">
+              <a:defRPr sz="1200"/>
+            </a:lvl1pPr>
+          </a:lstStyle>
+          <a:p>
+            <a:endParaRPr/>
+          </a:p>
+        </p:txBody>
+      </p:sp>
+      <p:sp>
+        <p:nvSpPr>
+          <p:cNvPr id="7" name="Slide Number Placeholder 6"/>
+          <p:cNvSpPr>
+            <a:spLocks noGrp="1"/>
+          </p:cNvSpPr>
+          <p:nvPr>
+            <p:ph type="sldNum" sz="quarter" idx="5"/>
+          </p:nvPr>
+        </p:nvSpPr>
+        <p:spPr>
+          <a:xfrm>
+            <a:off x="5180013" y="6502400"/>
+            <a:ext cx="3962400" cy="341313"/>
+          </a:xfrm>
+          <a:prstGeom prst="rect">
+            <a:avLst/>
+          </a:prstGeom>
+        </p:spPr>
+        <p:txBody>
+          <a:bodyPr vert="horz" lIns="91440" tIns="45720" rIns="91440" bIns="45720" rtlCol="0" anchor="b"/>
+          <a:lstStyle>
+            <a:lvl1pPr algn="r">
+              <a:defRPr sz="1200"/>
+            </a:lvl1pPr>
+          </a:lstStyle>
+          <a:p>
+            <a:r>
+              <a:rPr lang="cs-CZ"/>
+              <a:t>‹#›</a:t>
+            </a:r>
+          </a:p>
+        </p:txBody>
+      </p:sp>
+    </p:spTree>
+  </p:cSld>
+  <p:clrMapOvr>
+    <a:masterClrMapping/>
+  </p:clrMapOvr>
+</p:notes>
+</file>
+
+<file path=ppt/notesSlides/notesSlide11.xml><?xml version="1.0" encoding="utf-8"?>
+<p:notes xmlns:a="http://schemas.openxmlformats.org/drawingml/2006/main" xmlns:r="http://schemas.openxmlformats.org/officeDocument/2006/relationships" xmlns:p="http://schemas.openxmlformats.org/presentationml/2006/main">
+  <p:cSld>
+    <p:spTree>
+      <p:nvGrpSpPr>
+        <p:cNvPr id="1" name=""/>
+        <p:cNvGrpSpPr/>
+        <p:nvPr/>
+      </p:nvGrpSpPr>
+      <p:grpSpPr>
+        <a:xfrm>
+          <a:off x="0" y="0"/>
+          <a:ext cx="0" cy="0"/>
+          <a:chOff x="0" y="0"/>
+          <a:chExt cx="0" cy="0"/>
+        </a:xfrm>
+      </p:grpSpPr>
+      <p:sp>
+        <p:nvSpPr>
+          <p:cNvPr id="2" name="Header Placeholder 1"/>
+          <p:cNvSpPr>
+            <a:spLocks noGrp="1"/>
+          </p:cNvSpPr>
+          <p:nvPr>
+            <p:ph type="hdr" sz="quarter"/>
+          </p:nvPr>
+        </p:nvSpPr>
+        <p:spPr>
+          <a:xfrm>
+            <a:off x="0" y="0"/>
+            <a:ext cx="3962400" cy="342900"/>
+          </a:xfrm>
+          <a:prstGeom prst="rect">
+            <a:avLst/>
+          </a:prstGeom>
+        </p:spPr>
+        <p:txBody>
+          <a:bodyPr vert="horz" lIns="91440" tIns="45720" rIns="91440" bIns="45720" rtlCol="0"/>
+          <a:lstStyle>
+            <a:lvl1pPr algn="l">
+              <a:defRPr sz="1200"/>
+            </a:lvl1pPr>
+          </a:lstStyle>
+          <a:p>
+            <a:endParaRPr/>
+          </a:p>
+        </p:txBody>
+      </p:sp>
+      <p:sp>
+        <p:nvSpPr>
+          <p:cNvPr id="3" name="Date Placeholder 2"/>
+          <p:cNvSpPr>
+            <a:spLocks noGrp="1"/>
+          </p:cNvSpPr>
+          <p:nvPr>
+            <p:ph type="dt" idx="1"/>
+          </p:nvPr>
+        </p:nvSpPr>
+        <p:spPr>
+          <a:xfrm>
+            <a:off x="5180013" y="0"/>
+            <a:ext cx="3962400" cy="342900"/>
+          </a:xfrm>
+          <a:prstGeom prst="rect">
+            <a:avLst/>
+          </a:prstGeom>
+        </p:spPr>
+        <p:txBody>
+          <a:bodyPr vert="horz" lIns="91440" tIns="45720" rIns="91440" bIns="45720" rtlCol="0"/>
+          <a:lstStyle>
+            <a:lvl1pPr algn="r">
+              <a:defRPr sz="1200"/>
+            </a:lvl1pPr>
+          </a:lstStyle>
+          <a:p>
+            <a:r>
+              <a:rPr lang="cs-CZ"/>
+              <a:t>1.7.2013</a:t>
+            </a:r>
+          </a:p>
+        </p:txBody>
+      </p:sp>
+      <p:sp>
+        <p:nvSpPr>
+          <p:cNvPr id="4" name="Slide Image Placeholder 3"/>
+          <p:cNvSpPr>
+            <a:spLocks noGrp="1" noRot="1" noChangeAspect="1"/>
+          </p:cNvSpPr>
+          <p:nvPr>
+            <p:ph type="sldImg" idx="2"/>
+          </p:nvPr>
+        </p:nvSpPr>
+        <p:spPr>
+          <a:xfrm>
+            <a:off x="2290763" y="512763"/>
+            <a:ext cx="4562475" cy="2566987"/>
           </a:xfrm>
           <a:prstGeom prst="rect">
             <a:avLst/>
@@ -2613,7 +2832,7 @@
           <a:p>
             <a:r>
               <a:rPr lang="en-US"/>
-              <a:t>9</a:t>
+              <a:t>8</a:t>
             </a:r>
           </a:p>
         </p:txBody>
@@ -2684,6 +2903,11 @@
         </p:txBody>
       </p:sp>
     </p:spTree>
+    <p:extLst>
+      <p:ext uri="{BB962C8B-B14F-4D97-AF65-F5344CB8AC3E}">
+        <p14:creationId xmlns:p14="http://schemas.microsoft.com/office/powerpoint/2010/main" val="945773721"/>
+      </p:ext>
+    </p:extLst>
   </p:cSld>
   <p:clrMapOvr>
     <a:masterClrMapping/>
@@ -2871,7 +3095,7 @@
             <a:fld id="{1D8BD707-D9CF-40AE-B4C6-C98DA3205C09}" type="datetimeFigureOut">
               <a:rPr lang="en-US" smtClean="0"/>
               <a:pPr/>
-              <a:t>3/15/2026</a:t>
+              <a:t>3/18/2026</a:t>
             </a:fld>
             <a:endParaRPr lang="en-US"/>
           </a:p>
@@ -3036,7 +3260,7 @@
             <a:fld id="{1D8BD707-D9CF-40AE-B4C6-C98DA3205C09}" type="datetimeFigureOut">
               <a:rPr lang="en-US" smtClean="0"/>
               <a:pPr/>
-              <a:t>3/15/2026</a:t>
+              <a:t>3/18/2026</a:t>
             </a:fld>
             <a:endParaRPr lang="en-US"/>
           </a:p>
@@ -3211,7 +3435,7 @@
             <a:fld id="{1D8BD707-D9CF-40AE-B4C6-C98DA3205C09}" type="datetimeFigureOut">
               <a:rPr lang="en-US" smtClean="0"/>
               <a:pPr/>
-              <a:t>3/15/2026</a:t>
+              <a:t>3/18/2026</a:t>
             </a:fld>
             <a:endParaRPr lang="en-US"/>
           </a:p>
@@ -3376,7 +3600,7 @@
             <a:fld id="{1D8BD707-D9CF-40AE-B4C6-C98DA3205C09}" type="datetimeFigureOut">
               <a:rPr lang="en-US" smtClean="0"/>
               <a:pPr/>
-              <a:t>3/15/2026</a:t>
+              <a:t>3/18/2026</a:t>
             </a:fld>
             <a:endParaRPr lang="en-US"/>
           </a:p>
@@ -3618,7 +3842,7 @@
             <a:fld id="{1D8BD707-D9CF-40AE-B4C6-C98DA3205C09}" type="datetimeFigureOut">
               <a:rPr lang="en-US" smtClean="0"/>
               <a:pPr/>
-              <a:t>3/15/2026</a:t>
+              <a:t>3/18/2026</a:t>
             </a:fld>
             <a:endParaRPr lang="en-US"/>
           </a:p>
@@ -3900,7 +4124,7 @@
             <a:fld id="{1D8BD707-D9CF-40AE-B4C6-C98DA3205C09}" type="datetimeFigureOut">
               <a:rPr lang="en-US" smtClean="0"/>
               <a:pPr/>
-              <a:t>3/15/2026</a:t>
+              <a:t>3/18/2026</a:t>
             </a:fld>
             <a:endParaRPr lang="en-US"/>
           </a:p>
@@ -4316,7 +4540,7 @@
             <a:fld id="{1D8BD707-D9CF-40AE-B4C6-C98DA3205C09}" type="datetimeFigureOut">
               <a:rPr lang="en-US" smtClean="0"/>
               <a:pPr/>
-              <a:t>3/15/2026</a:t>
+              <a:t>3/18/2026</a:t>
             </a:fld>
             <a:endParaRPr lang="en-US"/>
           </a:p>
@@ -4430,7 +4654,7 @@
             <a:fld id="{1D8BD707-D9CF-40AE-B4C6-C98DA3205C09}" type="datetimeFigureOut">
               <a:rPr lang="en-US" smtClean="0"/>
               <a:pPr/>
-              <a:t>3/15/2026</a:t>
+              <a:t>3/18/2026</a:t>
             </a:fld>
             <a:endParaRPr lang="en-US"/>
           </a:p>
@@ -4522,7 +4746,7 @@
             <a:fld id="{1D8BD707-D9CF-40AE-B4C6-C98DA3205C09}" type="datetimeFigureOut">
               <a:rPr lang="en-US" smtClean="0"/>
               <a:pPr/>
-              <a:t>3/15/2026</a:t>
+              <a:t>3/18/2026</a:t>
             </a:fld>
             <a:endParaRPr lang="en-US"/>
           </a:p>
@@ -4794,7 +5018,7 @@
             <a:fld id="{1D8BD707-D9CF-40AE-B4C6-C98DA3205C09}" type="datetimeFigureOut">
               <a:rPr lang="en-US" smtClean="0"/>
               <a:pPr/>
-              <a:t>3/15/2026</a:t>
+              <a:t>3/18/2026</a:t>
             </a:fld>
             <a:endParaRPr lang="en-US"/>
           </a:p>
@@ -5043,7 +5267,7 @@
             <a:fld id="{1D8BD707-D9CF-40AE-B4C6-C98DA3205C09}" type="datetimeFigureOut">
               <a:rPr lang="en-US" smtClean="0"/>
               <a:pPr/>
-              <a:t>3/15/2026</a:t>
+              <a:t>3/18/2026</a:t>
             </a:fld>
             <a:endParaRPr lang="en-US"/>
           </a:p>
@@ -5251,7 +5475,7 @@
             <a:fld id="{1D8BD707-D9CF-40AE-B4C6-C98DA3205C09}" type="datetimeFigureOut">
               <a:rPr lang="en-US" smtClean="0"/>
               <a:pPr/>
-              <a:t>3/15/2026</a:t>
+              <a:t>3/18/2026</a:t>
             </a:fld>
             <a:endParaRPr lang="en-US"/>
           </a:p>
@@ -6169,6 +6393,1501 @@
         </p:nvSpPr>
         <p:spPr>
           <a:xfrm>
+            <a:off x="992238" y="1184377"/>
+            <a:ext cx="6202261" cy="813197"/>
+          </a:xfrm>
+          <a:prstGeom prst="rect">
+            <a:avLst/>
+          </a:prstGeom>
+        </p:spPr>
+        <p:txBody>
+          <a:bodyPr lIns="0" tIns="0" rIns="0" bIns="0" rtlCol="0" anchor="t">
+            <a:spAutoFit/>
+          </a:bodyPr>
+          <a:lstStyle/>
+          <a:p>
+            <a:pPr algn="l">
+              <a:lnSpc>
+                <a:spcPts val="6062"/>
+              </a:lnSpc>
+            </a:pPr>
+            <a:r>
+              <a:rPr lang="en-US" sz="4875" b="1">
+                <a:solidFill>
+                  <a:srgbClr val="505468"/>
+                </a:solidFill>
+                <a:latin typeface="Arimo Bold"/>
+                <a:ea typeface="Arimo Bold"/>
+                <a:cs typeface="Arimo Bold"/>
+                <a:sym typeface="Arimo Bold"/>
+              </a:rPr>
+              <a:t>Conclusión</a:t>
+            </a:r>
+          </a:p>
+        </p:txBody>
+      </p:sp>
+      <p:grpSp>
+        <p:nvGrpSpPr>
+          <p:cNvPr id="3" name="Group 3"/>
+          <p:cNvGrpSpPr/>
+          <p:nvPr/>
+        </p:nvGrpSpPr>
+        <p:grpSpPr>
+          <a:xfrm>
+            <a:off x="987476" y="2488854"/>
+            <a:ext cx="5278641" cy="3640779"/>
+            <a:chOff x="0" y="0"/>
+            <a:chExt cx="7038188" cy="4854372"/>
+          </a:xfrm>
+        </p:grpSpPr>
+        <p:sp>
+          <p:nvSpPr>
+            <p:cNvPr id="4" name="Freeform 4"/>
+            <p:cNvSpPr/>
+            <p:nvPr/>
+          </p:nvSpPr>
+          <p:spPr>
+            <a:xfrm>
+              <a:off x="6350" y="6350"/>
+              <a:ext cx="7025513" cy="4841621"/>
+            </a:xfrm>
+            <a:custGeom>
+              <a:avLst/>
+              <a:gdLst/>
+              <a:ahLst/>
+              <a:cxnLst/>
+              <a:rect l="l" t="t" r="r" b="b"/>
+              <a:pathLst>
+                <a:path w="7025513" h="4841621">
+                  <a:moveTo>
+                    <a:pt x="0" y="138938"/>
+                  </a:moveTo>
+                  <a:cubicBezTo>
+                    <a:pt x="0" y="62230"/>
+                    <a:pt x="62230" y="0"/>
+                    <a:pt x="139065" y="0"/>
+                  </a:cubicBezTo>
+                  <a:lnTo>
+                    <a:pt x="6886448" y="0"/>
+                  </a:lnTo>
+                  <a:cubicBezTo>
+                    <a:pt x="6963283" y="0"/>
+                    <a:pt x="7025513" y="62230"/>
+                    <a:pt x="7025513" y="138938"/>
+                  </a:cubicBezTo>
+                  <a:lnTo>
+                    <a:pt x="7025513" y="4702683"/>
+                  </a:lnTo>
+                  <a:cubicBezTo>
+                    <a:pt x="7025513" y="4779391"/>
+                    <a:pt x="6963283" y="4841621"/>
+                    <a:pt x="6886448" y="4841621"/>
+                  </a:cubicBezTo>
+                  <a:lnTo>
+                    <a:pt x="139065" y="4841621"/>
+                  </a:lnTo>
+                  <a:cubicBezTo>
+                    <a:pt x="62230" y="4841621"/>
+                    <a:pt x="0" y="4779518"/>
+                    <a:pt x="0" y="4702683"/>
+                  </a:cubicBezTo>
+                  <a:close/>
+                </a:path>
+              </a:pathLst>
+            </a:custGeom>
+            <a:solidFill>
+              <a:srgbClr val="E2E3E9"/>
+            </a:solidFill>
+          </p:spPr>
+        </p:sp>
+        <p:sp>
+          <p:nvSpPr>
+            <p:cNvPr id="5" name="Freeform 5"/>
+            <p:cNvSpPr/>
+            <p:nvPr/>
+          </p:nvSpPr>
+          <p:spPr>
+            <a:xfrm>
+              <a:off x="0" y="0"/>
+              <a:ext cx="7038213" cy="4854321"/>
+            </a:xfrm>
+            <a:custGeom>
+              <a:avLst/>
+              <a:gdLst/>
+              <a:ahLst/>
+              <a:cxnLst/>
+              <a:rect l="l" t="t" r="r" b="b"/>
+              <a:pathLst>
+                <a:path w="7038213" h="4854321">
+                  <a:moveTo>
+                    <a:pt x="0" y="145288"/>
+                  </a:moveTo>
+                  <a:cubicBezTo>
+                    <a:pt x="0" y="65024"/>
+                    <a:pt x="65151" y="0"/>
+                    <a:pt x="145415" y="0"/>
+                  </a:cubicBezTo>
+                  <a:lnTo>
+                    <a:pt x="6892798" y="0"/>
+                  </a:lnTo>
+                  <a:lnTo>
+                    <a:pt x="6892798" y="6350"/>
+                  </a:lnTo>
+                  <a:lnTo>
+                    <a:pt x="6892798" y="0"/>
+                  </a:lnTo>
+                  <a:cubicBezTo>
+                    <a:pt x="6973062" y="0"/>
+                    <a:pt x="7038213" y="65024"/>
+                    <a:pt x="7038213" y="145288"/>
+                  </a:cubicBezTo>
+                  <a:lnTo>
+                    <a:pt x="7031863" y="145288"/>
+                  </a:lnTo>
+                  <a:lnTo>
+                    <a:pt x="7038213" y="145288"/>
+                  </a:lnTo>
+                  <a:lnTo>
+                    <a:pt x="7038213" y="4709033"/>
+                  </a:lnTo>
+                  <a:lnTo>
+                    <a:pt x="7031863" y="4709033"/>
+                  </a:lnTo>
+                  <a:lnTo>
+                    <a:pt x="7038213" y="4709033"/>
+                  </a:lnTo>
+                  <a:cubicBezTo>
+                    <a:pt x="7038213" y="4789297"/>
+                    <a:pt x="6973062" y="4854321"/>
+                    <a:pt x="6892798" y="4854321"/>
+                  </a:cubicBezTo>
+                  <a:lnTo>
+                    <a:pt x="6892798" y="4847971"/>
+                  </a:lnTo>
+                  <a:lnTo>
+                    <a:pt x="6892798" y="4854321"/>
+                  </a:lnTo>
+                  <a:lnTo>
+                    <a:pt x="145415" y="4854321"/>
+                  </a:lnTo>
+                  <a:lnTo>
+                    <a:pt x="145415" y="4847971"/>
+                  </a:lnTo>
+                  <a:lnTo>
+                    <a:pt x="145415" y="4854321"/>
+                  </a:lnTo>
+                  <a:cubicBezTo>
+                    <a:pt x="65151" y="4854321"/>
+                    <a:pt x="0" y="4789297"/>
+                    <a:pt x="0" y="4709033"/>
+                  </a:cubicBezTo>
+                  <a:lnTo>
+                    <a:pt x="0" y="145288"/>
+                  </a:lnTo>
+                  <a:lnTo>
+                    <a:pt x="6350" y="145288"/>
+                  </a:lnTo>
+                  <a:lnTo>
+                    <a:pt x="0" y="145288"/>
+                  </a:lnTo>
+                  <a:moveTo>
+                    <a:pt x="12700" y="145288"/>
+                  </a:moveTo>
+                  <a:lnTo>
+                    <a:pt x="12700" y="4709033"/>
+                  </a:lnTo>
+                  <a:lnTo>
+                    <a:pt x="6350" y="4709033"/>
+                  </a:lnTo>
+                  <a:lnTo>
+                    <a:pt x="12700" y="4709033"/>
+                  </a:lnTo>
+                  <a:cubicBezTo>
+                    <a:pt x="12700" y="4782312"/>
+                    <a:pt x="72136" y="4841621"/>
+                    <a:pt x="145415" y="4841621"/>
+                  </a:cubicBezTo>
+                  <a:lnTo>
+                    <a:pt x="6892798" y="4841621"/>
+                  </a:lnTo>
+                  <a:cubicBezTo>
+                    <a:pt x="6966077" y="4841621"/>
+                    <a:pt x="7025513" y="4782185"/>
+                    <a:pt x="7025513" y="4709033"/>
+                  </a:cubicBezTo>
+                  <a:lnTo>
+                    <a:pt x="7025513" y="145288"/>
+                  </a:lnTo>
+                  <a:cubicBezTo>
+                    <a:pt x="7025513" y="72136"/>
+                    <a:pt x="6966077" y="12700"/>
+                    <a:pt x="6892798" y="12700"/>
+                  </a:cubicBezTo>
+                  <a:lnTo>
+                    <a:pt x="145415" y="12700"/>
+                  </a:lnTo>
+                  <a:lnTo>
+                    <a:pt x="145415" y="6350"/>
+                  </a:lnTo>
+                  <a:lnTo>
+                    <a:pt x="145415" y="12700"/>
+                  </a:lnTo>
+                  <a:cubicBezTo>
+                    <a:pt x="72136" y="12700"/>
+                    <a:pt x="12700" y="72136"/>
+                    <a:pt x="12700" y="145288"/>
+                  </a:cubicBezTo>
+                  <a:close/>
+                </a:path>
+              </a:pathLst>
+            </a:custGeom>
+            <a:solidFill>
+              <a:srgbClr val="C8C9CF"/>
+            </a:solidFill>
+          </p:spPr>
+        </p:sp>
+      </p:grpSp>
+      <p:grpSp>
+        <p:nvGrpSpPr>
+          <p:cNvPr id="6" name="Group 6"/>
+          <p:cNvGrpSpPr/>
+          <p:nvPr/>
+        </p:nvGrpSpPr>
+        <p:grpSpPr>
+          <a:xfrm>
+            <a:off x="1249709" y="2751087"/>
+            <a:ext cx="744141" cy="744141"/>
+            <a:chOff x="0" y="0"/>
+            <a:chExt cx="992188" cy="992188"/>
+          </a:xfrm>
+        </p:grpSpPr>
+        <p:sp>
+          <p:nvSpPr>
+            <p:cNvPr id="7" name="Freeform 7" descr="preencoded.png"/>
+            <p:cNvSpPr/>
+            <p:nvPr/>
+          </p:nvSpPr>
+          <p:spPr>
+            <a:xfrm>
+              <a:off x="0" y="0"/>
+              <a:ext cx="992251" cy="992251"/>
+            </a:xfrm>
+            <a:custGeom>
+              <a:avLst/>
+              <a:gdLst/>
+              <a:ahLst/>
+              <a:cxnLst/>
+              <a:rect l="l" t="t" r="r" b="b"/>
+              <a:pathLst>
+                <a:path w="992251" h="992251">
+                  <a:moveTo>
+                    <a:pt x="0" y="0"/>
+                  </a:moveTo>
+                  <a:lnTo>
+                    <a:pt x="992251" y="0"/>
+                  </a:lnTo>
+                  <a:lnTo>
+                    <a:pt x="992251" y="992251"/>
+                  </a:lnTo>
+                  <a:lnTo>
+                    <a:pt x="0" y="992251"/>
+                  </a:lnTo>
+                  <a:lnTo>
+                    <a:pt x="0" y="0"/>
+                  </a:lnTo>
+                  <a:close/>
+                </a:path>
+              </a:pathLst>
+            </a:custGeom>
+            <a:blipFill>
+              <a:blip r:embed="rId3"/>
+              <a:stretch>
+                <a:fillRect r="6" b="6"/>
+              </a:stretch>
+            </a:blipFill>
+          </p:spPr>
+        </p:sp>
+      </p:grpSp>
+      <p:sp>
+        <p:nvSpPr>
+          <p:cNvPr id="8" name="Freeform 8" descr="preencoded.png"/>
+          <p:cNvSpPr/>
+          <p:nvPr/>
+        </p:nvSpPr>
+        <p:spPr>
+          <a:xfrm>
+            <a:off x="1454353" y="2955579"/>
+            <a:ext cx="334861" cy="334861"/>
+          </a:xfrm>
+          <a:custGeom>
+            <a:avLst/>
+            <a:gdLst/>
+            <a:ahLst/>
+            <a:cxnLst/>
+            <a:rect l="l" t="t" r="r" b="b"/>
+            <a:pathLst>
+              <a:path w="334861" h="334861">
+                <a:moveTo>
+                  <a:pt x="0" y="0"/>
+                </a:moveTo>
+                <a:lnTo>
+                  <a:pt x="334861" y="0"/>
+                </a:lnTo>
+                <a:lnTo>
+                  <a:pt x="334861" y="334861"/>
+                </a:lnTo>
+                <a:lnTo>
+                  <a:pt x="0" y="334861"/>
+                </a:lnTo>
+                <a:lnTo>
+                  <a:pt x="0" y="0"/>
+                </a:lnTo>
+                <a:close/>
+              </a:path>
+            </a:pathLst>
+          </a:custGeom>
+          <a:blipFill>
+            <a:blip r:embed="rId4">
+              <a:extLst>
+                <a:ext uri="{96DAC541-7B7A-43D3-8B79-37D633B846F1}">
+                  <asvg:svgBlip xmlns:asvg="http://schemas.microsoft.com/office/drawing/2016/SVG/main" r:embed="rId5"/>
+                </a:ext>
+              </a:extLst>
+            </a:blip>
+            <a:stretch>
+              <a:fillRect t="-18056" b="-18056"/>
+            </a:stretch>
+          </a:blipFill>
+        </p:spPr>
+      </p:sp>
+      <p:sp>
+        <p:nvSpPr>
+          <p:cNvPr id="9" name="TextBox 9"/>
+          <p:cNvSpPr txBox="1"/>
+          <p:nvPr/>
+        </p:nvSpPr>
+        <p:spPr>
+          <a:xfrm>
+            <a:off x="1249709" y="3733648"/>
+            <a:ext cx="4533338" cy="359714"/>
+          </a:xfrm>
+          <a:prstGeom prst="rect">
+            <a:avLst/>
+          </a:prstGeom>
+        </p:spPr>
+        <p:txBody>
+          <a:bodyPr wrap="square" lIns="0" tIns="0" rIns="0" bIns="0" rtlCol="0" anchor="t">
+            <a:spAutoFit/>
+          </a:bodyPr>
+          <a:lstStyle/>
+          <a:p>
+            <a:pPr algn="l">
+              <a:lnSpc>
+                <a:spcPts val="2999"/>
+              </a:lnSpc>
+            </a:pPr>
+            <a:r>
+              <a:rPr lang="en-US" sz="2437" b="1" dirty="0" err="1">
+                <a:solidFill>
+                  <a:srgbClr val="5B5F71"/>
+                </a:solidFill>
+                <a:latin typeface="Arimo Bold"/>
+                <a:ea typeface="Arimo Bold"/>
+                <a:cs typeface="Arimo Bold"/>
+                <a:sym typeface="Arimo Bold"/>
+              </a:rPr>
+              <a:t>Comprensión</a:t>
+            </a:r>
+            <a:r>
+              <a:rPr lang="en-US" sz="2437" b="1" dirty="0">
+                <a:solidFill>
+                  <a:srgbClr val="5B5F71"/>
+                </a:solidFill>
+                <a:latin typeface="Arimo Bold"/>
+                <a:ea typeface="Arimo Bold"/>
+                <a:cs typeface="Arimo Bold"/>
+                <a:sym typeface="Arimo Bold"/>
+              </a:rPr>
+              <a:t> del </a:t>
+            </a:r>
+            <a:r>
+              <a:rPr lang="en-US" sz="2437" b="1" dirty="0" err="1">
+                <a:solidFill>
+                  <a:srgbClr val="5B5F71"/>
+                </a:solidFill>
+                <a:latin typeface="Arimo Bold"/>
+                <a:ea typeface="Arimo Bold"/>
+                <a:cs typeface="Arimo Bold"/>
+                <a:sym typeface="Arimo Bold"/>
+              </a:rPr>
+              <a:t>proceso</a:t>
+            </a:r>
+            <a:endParaRPr lang="en-US" sz="2437" b="1" dirty="0">
+              <a:solidFill>
+                <a:srgbClr val="5B5F71"/>
+              </a:solidFill>
+              <a:latin typeface="Arimo Bold"/>
+              <a:ea typeface="Arimo Bold"/>
+              <a:cs typeface="Arimo Bold"/>
+              <a:sym typeface="Arimo Bold"/>
+            </a:endParaRPr>
+          </a:p>
+        </p:txBody>
+      </p:sp>
+      <p:sp>
+        <p:nvSpPr>
+          <p:cNvPr id="10" name="TextBox 10"/>
+          <p:cNvSpPr txBox="1"/>
+          <p:nvPr/>
+        </p:nvSpPr>
+        <p:spPr>
+          <a:xfrm>
+            <a:off x="1249709" y="4184447"/>
+            <a:ext cx="4754166" cy="1682953"/>
+          </a:xfrm>
+          <a:prstGeom prst="rect">
+            <a:avLst/>
+          </a:prstGeom>
+        </p:spPr>
+        <p:txBody>
+          <a:bodyPr lIns="0" tIns="0" rIns="0" bIns="0" rtlCol="0" anchor="t">
+            <a:spAutoFit/>
+          </a:bodyPr>
+          <a:lstStyle/>
+          <a:p>
+            <a:pPr algn="l">
+              <a:lnSpc>
+                <a:spcPts val="3125"/>
+              </a:lnSpc>
+            </a:pPr>
+            <a:r>
+              <a:rPr lang="en-US" sz="1937">
+                <a:solidFill>
+                  <a:srgbClr val="5B5F71"/>
+                </a:solidFill>
+                <a:latin typeface="Arimo"/>
+                <a:ea typeface="Arimo"/>
+                <a:cs typeface="Arimo"/>
+                <a:sym typeface="Arimo"/>
+              </a:rPr>
+              <a:t>Los ejercicios permitieron comprender cómo funciona el análisis léxico dentro del proceso de compilación de un programa</a:t>
+            </a:r>
+          </a:p>
+        </p:txBody>
+      </p:sp>
+      <p:grpSp>
+        <p:nvGrpSpPr>
+          <p:cNvPr id="11" name="Group 11"/>
+          <p:cNvGrpSpPr/>
+          <p:nvPr/>
+        </p:nvGrpSpPr>
+        <p:grpSpPr>
+          <a:xfrm>
+            <a:off x="6504537" y="2488854"/>
+            <a:ext cx="5278784" cy="3640779"/>
+            <a:chOff x="0" y="0"/>
+            <a:chExt cx="7038378" cy="4854372"/>
+          </a:xfrm>
+        </p:grpSpPr>
+        <p:sp>
+          <p:nvSpPr>
+            <p:cNvPr id="12" name="Freeform 12"/>
+            <p:cNvSpPr/>
+            <p:nvPr/>
+          </p:nvSpPr>
+          <p:spPr>
+            <a:xfrm>
+              <a:off x="6350" y="6350"/>
+              <a:ext cx="7025640" cy="4841621"/>
+            </a:xfrm>
+            <a:custGeom>
+              <a:avLst/>
+              <a:gdLst/>
+              <a:ahLst/>
+              <a:cxnLst/>
+              <a:rect l="l" t="t" r="r" b="b"/>
+              <a:pathLst>
+                <a:path w="7025640" h="4841621">
+                  <a:moveTo>
+                    <a:pt x="0" y="138938"/>
+                  </a:moveTo>
+                  <a:cubicBezTo>
+                    <a:pt x="0" y="62230"/>
+                    <a:pt x="62230" y="0"/>
+                    <a:pt x="139065" y="0"/>
+                  </a:cubicBezTo>
+                  <a:lnTo>
+                    <a:pt x="6886575" y="0"/>
+                  </a:lnTo>
+                  <a:cubicBezTo>
+                    <a:pt x="6963410" y="0"/>
+                    <a:pt x="7025640" y="62230"/>
+                    <a:pt x="7025640" y="138938"/>
+                  </a:cubicBezTo>
+                  <a:lnTo>
+                    <a:pt x="7025640" y="4702683"/>
+                  </a:lnTo>
+                  <a:cubicBezTo>
+                    <a:pt x="7025640" y="4779391"/>
+                    <a:pt x="6963410" y="4841621"/>
+                    <a:pt x="6886575" y="4841621"/>
+                  </a:cubicBezTo>
+                  <a:lnTo>
+                    <a:pt x="139065" y="4841621"/>
+                  </a:lnTo>
+                  <a:cubicBezTo>
+                    <a:pt x="62230" y="4841621"/>
+                    <a:pt x="0" y="4779518"/>
+                    <a:pt x="0" y="4702683"/>
+                  </a:cubicBezTo>
+                  <a:close/>
+                </a:path>
+              </a:pathLst>
+            </a:custGeom>
+            <a:solidFill>
+              <a:srgbClr val="E2E3E9"/>
+            </a:solidFill>
+          </p:spPr>
+        </p:sp>
+        <p:sp>
+          <p:nvSpPr>
+            <p:cNvPr id="13" name="Freeform 13"/>
+            <p:cNvSpPr/>
+            <p:nvPr/>
+          </p:nvSpPr>
+          <p:spPr>
+            <a:xfrm>
+              <a:off x="0" y="0"/>
+              <a:ext cx="7038340" cy="4854321"/>
+            </a:xfrm>
+            <a:custGeom>
+              <a:avLst/>
+              <a:gdLst/>
+              <a:ahLst/>
+              <a:cxnLst/>
+              <a:rect l="l" t="t" r="r" b="b"/>
+              <a:pathLst>
+                <a:path w="7038340" h="4854321">
+                  <a:moveTo>
+                    <a:pt x="0" y="145288"/>
+                  </a:moveTo>
+                  <a:cubicBezTo>
+                    <a:pt x="0" y="65024"/>
+                    <a:pt x="65151" y="0"/>
+                    <a:pt x="145415" y="0"/>
+                  </a:cubicBezTo>
+                  <a:lnTo>
+                    <a:pt x="6892925" y="0"/>
+                  </a:lnTo>
+                  <a:lnTo>
+                    <a:pt x="6892925" y="6350"/>
+                  </a:lnTo>
+                  <a:lnTo>
+                    <a:pt x="6892925" y="0"/>
+                  </a:lnTo>
+                  <a:cubicBezTo>
+                    <a:pt x="6973189" y="0"/>
+                    <a:pt x="7038340" y="65024"/>
+                    <a:pt x="7038340" y="145288"/>
+                  </a:cubicBezTo>
+                  <a:lnTo>
+                    <a:pt x="7031990" y="145288"/>
+                  </a:lnTo>
+                  <a:lnTo>
+                    <a:pt x="7038340" y="145288"/>
+                  </a:lnTo>
+                  <a:lnTo>
+                    <a:pt x="7038340" y="4709033"/>
+                  </a:lnTo>
+                  <a:lnTo>
+                    <a:pt x="7031990" y="4709033"/>
+                  </a:lnTo>
+                  <a:lnTo>
+                    <a:pt x="7038340" y="4709033"/>
+                  </a:lnTo>
+                  <a:cubicBezTo>
+                    <a:pt x="7038340" y="4789297"/>
+                    <a:pt x="6973189" y="4854321"/>
+                    <a:pt x="6892925" y="4854321"/>
+                  </a:cubicBezTo>
+                  <a:lnTo>
+                    <a:pt x="6892925" y="4847971"/>
+                  </a:lnTo>
+                  <a:lnTo>
+                    <a:pt x="6892925" y="4854321"/>
+                  </a:lnTo>
+                  <a:lnTo>
+                    <a:pt x="145415" y="4854321"/>
+                  </a:lnTo>
+                  <a:lnTo>
+                    <a:pt x="145415" y="4847971"/>
+                  </a:lnTo>
+                  <a:lnTo>
+                    <a:pt x="145415" y="4854321"/>
+                  </a:lnTo>
+                  <a:cubicBezTo>
+                    <a:pt x="65151" y="4854321"/>
+                    <a:pt x="0" y="4789297"/>
+                    <a:pt x="0" y="4709033"/>
+                  </a:cubicBezTo>
+                  <a:lnTo>
+                    <a:pt x="0" y="145288"/>
+                  </a:lnTo>
+                  <a:lnTo>
+                    <a:pt x="6350" y="145288"/>
+                  </a:lnTo>
+                  <a:lnTo>
+                    <a:pt x="0" y="145288"/>
+                  </a:lnTo>
+                  <a:moveTo>
+                    <a:pt x="12700" y="145288"/>
+                  </a:moveTo>
+                  <a:lnTo>
+                    <a:pt x="12700" y="4709033"/>
+                  </a:lnTo>
+                  <a:lnTo>
+                    <a:pt x="6350" y="4709033"/>
+                  </a:lnTo>
+                  <a:lnTo>
+                    <a:pt x="12700" y="4709033"/>
+                  </a:lnTo>
+                  <a:cubicBezTo>
+                    <a:pt x="12700" y="4782312"/>
+                    <a:pt x="72136" y="4841621"/>
+                    <a:pt x="145415" y="4841621"/>
+                  </a:cubicBezTo>
+                  <a:lnTo>
+                    <a:pt x="6892925" y="4841621"/>
+                  </a:lnTo>
+                  <a:cubicBezTo>
+                    <a:pt x="6966203" y="4841621"/>
+                    <a:pt x="7025640" y="4782185"/>
+                    <a:pt x="7025640" y="4709033"/>
+                  </a:cubicBezTo>
+                  <a:lnTo>
+                    <a:pt x="7025640" y="145288"/>
+                  </a:lnTo>
+                  <a:cubicBezTo>
+                    <a:pt x="7025640" y="72136"/>
+                    <a:pt x="6966204" y="12700"/>
+                    <a:pt x="6892925" y="12700"/>
+                  </a:cubicBezTo>
+                  <a:lnTo>
+                    <a:pt x="145415" y="12700"/>
+                  </a:lnTo>
+                  <a:lnTo>
+                    <a:pt x="145415" y="6350"/>
+                  </a:lnTo>
+                  <a:lnTo>
+                    <a:pt x="145415" y="12700"/>
+                  </a:lnTo>
+                  <a:cubicBezTo>
+                    <a:pt x="72136" y="12700"/>
+                    <a:pt x="12700" y="72136"/>
+                    <a:pt x="12700" y="145288"/>
+                  </a:cubicBezTo>
+                  <a:close/>
+                </a:path>
+              </a:pathLst>
+            </a:custGeom>
+            <a:solidFill>
+              <a:srgbClr val="C8C9CF"/>
+            </a:solidFill>
+          </p:spPr>
+        </p:sp>
+      </p:grpSp>
+      <p:grpSp>
+        <p:nvGrpSpPr>
+          <p:cNvPr id="14" name="Group 14"/>
+          <p:cNvGrpSpPr/>
+          <p:nvPr/>
+        </p:nvGrpSpPr>
+        <p:grpSpPr>
+          <a:xfrm>
+            <a:off x="6766770" y="2751087"/>
+            <a:ext cx="744141" cy="744141"/>
+            <a:chOff x="0" y="0"/>
+            <a:chExt cx="992188" cy="992188"/>
+          </a:xfrm>
+        </p:grpSpPr>
+        <p:sp>
+          <p:nvSpPr>
+            <p:cNvPr id="15" name="Freeform 15" descr="preencoded.png"/>
+            <p:cNvSpPr/>
+            <p:nvPr/>
+          </p:nvSpPr>
+          <p:spPr>
+            <a:xfrm>
+              <a:off x="0" y="0"/>
+              <a:ext cx="992251" cy="992251"/>
+            </a:xfrm>
+            <a:custGeom>
+              <a:avLst/>
+              <a:gdLst/>
+              <a:ahLst/>
+              <a:cxnLst/>
+              <a:rect l="l" t="t" r="r" b="b"/>
+              <a:pathLst>
+                <a:path w="992251" h="992251">
+                  <a:moveTo>
+                    <a:pt x="0" y="0"/>
+                  </a:moveTo>
+                  <a:lnTo>
+                    <a:pt x="992251" y="0"/>
+                  </a:lnTo>
+                  <a:lnTo>
+                    <a:pt x="992251" y="992251"/>
+                  </a:lnTo>
+                  <a:lnTo>
+                    <a:pt x="0" y="992251"/>
+                  </a:lnTo>
+                  <a:lnTo>
+                    <a:pt x="0" y="0"/>
+                  </a:lnTo>
+                  <a:close/>
+                </a:path>
+              </a:pathLst>
+            </a:custGeom>
+            <a:blipFill>
+              <a:blip r:embed="rId6"/>
+              <a:stretch>
+                <a:fillRect r="6" b="6"/>
+              </a:stretch>
+            </a:blipFill>
+          </p:spPr>
+        </p:sp>
+      </p:grpSp>
+      <p:sp>
+        <p:nvSpPr>
+          <p:cNvPr id="16" name="Freeform 16" descr="preencoded.png"/>
+          <p:cNvSpPr/>
+          <p:nvPr/>
+        </p:nvSpPr>
+        <p:spPr>
+          <a:xfrm>
+            <a:off x="6971405" y="2955579"/>
+            <a:ext cx="334861" cy="334861"/>
+          </a:xfrm>
+          <a:custGeom>
+            <a:avLst/>
+            <a:gdLst/>
+            <a:ahLst/>
+            <a:cxnLst/>
+            <a:rect l="l" t="t" r="r" b="b"/>
+            <a:pathLst>
+              <a:path w="334861" h="334861">
+                <a:moveTo>
+                  <a:pt x="0" y="0"/>
+                </a:moveTo>
+                <a:lnTo>
+                  <a:pt x="334861" y="0"/>
+                </a:lnTo>
+                <a:lnTo>
+                  <a:pt x="334861" y="334861"/>
+                </a:lnTo>
+                <a:lnTo>
+                  <a:pt x="0" y="334861"/>
+                </a:lnTo>
+                <a:lnTo>
+                  <a:pt x="0" y="0"/>
+                </a:lnTo>
+                <a:close/>
+              </a:path>
+            </a:pathLst>
+          </a:custGeom>
+          <a:blipFill>
+            <a:blip r:embed="rId7">
+              <a:extLst>
+                <a:ext uri="{96DAC541-7B7A-43D3-8B79-37D633B846F1}">
+                  <asvg:svgBlip xmlns:asvg="http://schemas.microsoft.com/office/drawing/2016/SVG/main" r:embed="rId8"/>
+                </a:ext>
+              </a:extLst>
+            </a:blip>
+            <a:stretch>
+              <a:fillRect/>
+            </a:stretch>
+          </a:blipFill>
+        </p:spPr>
+      </p:sp>
+      <p:sp>
+        <p:nvSpPr>
+          <p:cNvPr id="17" name="TextBox 17"/>
+          <p:cNvSpPr txBox="1"/>
+          <p:nvPr/>
+        </p:nvSpPr>
+        <p:spPr>
+          <a:xfrm>
+            <a:off x="6766770" y="3733648"/>
+            <a:ext cx="4754318" cy="359714"/>
+          </a:xfrm>
+          <a:prstGeom prst="rect">
+            <a:avLst/>
+          </a:prstGeom>
+        </p:spPr>
+        <p:txBody>
+          <a:bodyPr wrap="square" lIns="0" tIns="0" rIns="0" bIns="0" rtlCol="0" anchor="t">
+            <a:spAutoFit/>
+          </a:bodyPr>
+          <a:lstStyle/>
+          <a:p>
+            <a:pPr algn="l">
+              <a:lnSpc>
+                <a:spcPts val="2999"/>
+              </a:lnSpc>
+            </a:pPr>
+            <a:r>
+              <a:rPr lang="en-US" sz="2437" b="1" dirty="0" err="1">
+                <a:solidFill>
+                  <a:srgbClr val="5B5F71"/>
+                </a:solidFill>
+                <a:latin typeface="Arimo Bold"/>
+                <a:ea typeface="Arimo Bold"/>
+                <a:cs typeface="Arimo Bold"/>
+                <a:sym typeface="Arimo Bold"/>
+              </a:rPr>
+              <a:t>Identificación</a:t>
+            </a:r>
+            <a:r>
+              <a:rPr lang="en-US" sz="2437" b="1" dirty="0">
+                <a:solidFill>
+                  <a:srgbClr val="5B5F71"/>
+                </a:solidFill>
+                <a:latin typeface="Arimo Bold"/>
+                <a:ea typeface="Arimo Bold"/>
+                <a:cs typeface="Arimo Bold"/>
+                <a:sym typeface="Arimo Bold"/>
+              </a:rPr>
+              <a:t> de </a:t>
+            </a:r>
+            <a:r>
+              <a:rPr lang="en-US" sz="2437" b="1" dirty="0" err="1">
+                <a:solidFill>
+                  <a:srgbClr val="5B5F71"/>
+                </a:solidFill>
+                <a:latin typeface="Arimo Bold"/>
+                <a:ea typeface="Arimo Bold"/>
+                <a:cs typeface="Arimo Bold"/>
+                <a:sym typeface="Arimo Bold"/>
+              </a:rPr>
+              <a:t>elementos</a:t>
+            </a:r>
+            <a:endParaRPr lang="en-US" sz="2437" b="1" dirty="0">
+              <a:solidFill>
+                <a:srgbClr val="5B5F71"/>
+              </a:solidFill>
+              <a:latin typeface="Arimo Bold"/>
+              <a:ea typeface="Arimo Bold"/>
+              <a:cs typeface="Arimo Bold"/>
+              <a:sym typeface="Arimo Bold"/>
+            </a:endParaRPr>
+          </a:p>
+        </p:txBody>
+      </p:sp>
+      <p:sp>
+        <p:nvSpPr>
+          <p:cNvPr id="18" name="TextBox 18"/>
+          <p:cNvSpPr txBox="1"/>
+          <p:nvPr/>
+        </p:nvSpPr>
+        <p:spPr>
+          <a:xfrm>
+            <a:off x="6766770" y="4184447"/>
+            <a:ext cx="4754318" cy="1286027"/>
+          </a:xfrm>
+          <a:prstGeom prst="rect">
+            <a:avLst/>
+          </a:prstGeom>
+        </p:spPr>
+        <p:txBody>
+          <a:bodyPr lIns="0" tIns="0" rIns="0" bIns="0" rtlCol="0" anchor="t">
+            <a:spAutoFit/>
+          </a:bodyPr>
+          <a:lstStyle/>
+          <a:p>
+            <a:pPr algn="l">
+              <a:lnSpc>
+                <a:spcPts val="3125"/>
+              </a:lnSpc>
+            </a:pPr>
+            <a:r>
+              <a:rPr lang="en-US" sz="1937">
+                <a:solidFill>
+                  <a:srgbClr val="5B5F71"/>
+                </a:solidFill>
+                <a:latin typeface="Arimo"/>
+                <a:ea typeface="Arimo"/>
+                <a:cs typeface="Arimo"/>
+                <a:sym typeface="Arimo"/>
+              </a:rPr>
+              <a:t>Se dominó la identificación de tokens, lexemas y errores léxicos en diferentes fragmentos de código</a:t>
+            </a:r>
+          </a:p>
+        </p:txBody>
+      </p:sp>
+      <p:grpSp>
+        <p:nvGrpSpPr>
+          <p:cNvPr id="19" name="Group 19"/>
+          <p:cNvGrpSpPr/>
+          <p:nvPr/>
+        </p:nvGrpSpPr>
+        <p:grpSpPr>
+          <a:xfrm>
+            <a:off x="12021741" y="2488854"/>
+            <a:ext cx="5278641" cy="3640779"/>
+            <a:chOff x="0" y="0"/>
+            <a:chExt cx="7038188" cy="4854372"/>
+          </a:xfrm>
+        </p:grpSpPr>
+        <p:sp>
+          <p:nvSpPr>
+            <p:cNvPr id="20" name="Freeform 20"/>
+            <p:cNvSpPr/>
+            <p:nvPr/>
+          </p:nvSpPr>
+          <p:spPr>
+            <a:xfrm>
+              <a:off x="6350" y="6350"/>
+              <a:ext cx="7025513" cy="4841621"/>
+            </a:xfrm>
+            <a:custGeom>
+              <a:avLst/>
+              <a:gdLst/>
+              <a:ahLst/>
+              <a:cxnLst/>
+              <a:rect l="l" t="t" r="r" b="b"/>
+              <a:pathLst>
+                <a:path w="7025513" h="4841621">
+                  <a:moveTo>
+                    <a:pt x="0" y="138938"/>
+                  </a:moveTo>
+                  <a:cubicBezTo>
+                    <a:pt x="0" y="62230"/>
+                    <a:pt x="62230" y="0"/>
+                    <a:pt x="139065" y="0"/>
+                  </a:cubicBezTo>
+                  <a:lnTo>
+                    <a:pt x="6886448" y="0"/>
+                  </a:lnTo>
+                  <a:cubicBezTo>
+                    <a:pt x="6963283" y="0"/>
+                    <a:pt x="7025513" y="62230"/>
+                    <a:pt x="7025513" y="138938"/>
+                  </a:cubicBezTo>
+                  <a:lnTo>
+                    <a:pt x="7025513" y="4702683"/>
+                  </a:lnTo>
+                  <a:cubicBezTo>
+                    <a:pt x="7025513" y="4779391"/>
+                    <a:pt x="6963283" y="4841621"/>
+                    <a:pt x="6886448" y="4841621"/>
+                  </a:cubicBezTo>
+                  <a:lnTo>
+                    <a:pt x="139065" y="4841621"/>
+                  </a:lnTo>
+                  <a:cubicBezTo>
+                    <a:pt x="62230" y="4841621"/>
+                    <a:pt x="0" y="4779518"/>
+                    <a:pt x="0" y="4702683"/>
+                  </a:cubicBezTo>
+                  <a:close/>
+                </a:path>
+              </a:pathLst>
+            </a:custGeom>
+            <a:solidFill>
+              <a:srgbClr val="E2E3E9"/>
+            </a:solidFill>
+          </p:spPr>
+        </p:sp>
+        <p:sp>
+          <p:nvSpPr>
+            <p:cNvPr id="21" name="Freeform 21"/>
+            <p:cNvSpPr/>
+            <p:nvPr/>
+          </p:nvSpPr>
+          <p:spPr>
+            <a:xfrm>
+              <a:off x="0" y="0"/>
+              <a:ext cx="7038213" cy="4854321"/>
+            </a:xfrm>
+            <a:custGeom>
+              <a:avLst/>
+              <a:gdLst/>
+              <a:ahLst/>
+              <a:cxnLst/>
+              <a:rect l="l" t="t" r="r" b="b"/>
+              <a:pathLst>
+                <a:path w="7038213" h="4854321">
+                  <a:moveTo>
+                    <a:pt x="0" y="145288"/>
+                  </a:moveTo>
+                  <a:cubicBezTo>
+                    <a:pt x="0" y="65024"/>
+                    <a:pt x="65151" y="0"/>
+                    <a:pt x="145415" y="0"/>
+                  </a:cubicBezTo>
+                  <a:lnTo>
+                    <a:pt x="6892798" y="0"/>
+                  </a:lnTo>
+                  <a:lnTo>
+                    <a:pt x="6892798" y="6350"/>
+                  </a:lnTo>
+                  <a:lnTo>
+                    <a:pt x="6892798" y="0"/>
+                  </a:lnTo>
+                  <a:cubicBezTo>
+                    <a:pt x="6973062" y="0"/>
+                    <a:pt x="7038213" y="65024"/>
+                    <a:pt x="7038213" y="145288"/>
+                  </a:cubicBezTo>
+                  <a:lnTo>
+                    <a:pt x="7031863" y="145288"/>
+                  </a:lnTo>
+                  <a:lnTo>
+                    <a:pt x="7038213" y="145288"/>
+                  </a:lnTo>
+                  <a:lnTo>
+                    <a:pt x="7038213" y="4709033"/>
+                  </a:lnTo>
+                  <a:lnTo>
+                    <a:pt x="7031863" y="4709033"/>
+                  </a:lnTo>
+                  <a:lnTo>
+                    <a:pt x="7038213" y="4709033"/>
+                  </a:lnTo>
+                  <a:cubicBezTo>
+                    <a:pt x="7038213" y="4789297"/>
+                    <a:pt x="6973062" y="4854321"/>
+                    <a:pt x="6892798" y="4854321"/>
+                  </a:cubicBezTo>
+                  <a:lnTo>
+                    <a:pt x="6892798" y="4847971"/>
+                  </a:lnTo>
+                  <a:lnTo>
+                    <a:pt x="6892798" y="4854321"/>
+                  </a:lnTo>
+                  <a:lnTo>
+                    <a:pt x="145415" y="4854321"/>
+                  </a:lnTo>
+                  <a:lnTo>
+                    <a:pt x="145415" y="4847971"/>
+                  </a:lnTo>
+                  <a:lnTo>
+                    <a:pt x="145415" y="4854321"/>
+                  </a:lnTo>
+                  <a:cubicBezTo>
+                    <a:pt x="65151" y="4854321"/>
+                    <a:pt x="0" y="4789297"/>
+                    <a:pt x="0" y="4709033"/>
+                  </a:cubicBezTo>
+                  <a:lnTo>
+                    <a:pt x="0" y="145288"/>
+                  </a:lnTo>
+                  <a:lnTo>
+                    <a:pt x="6350" y="145288"/>
+                  </a:lnTo>
+                  <a:lnTo>
+                    <a:pt x="0" y="145288"/>
+                  </a:lnTo>
+                  <a:moveTo>
+                    <a:pt x="12700" y="145288"/>
+                  </a:moveTo>
+                  <a:lnTo>
+                    <a:pt x="12700" y="4709033"/>
+                  </a:lnTo>
+                  <a:lnTo>
+                    <a:pt x="6350" y="4709033"/>
+                  </a:lnTo>
+                  <a:lnTo>
+                    <a:pt x="12700" y="4709033"/>
+                  </a:lnTo>
+                  <a:cubicBezTo>
+                    <a:pt x="12700" y="4782312"/>
+                    <a:pt x="72136" y="4841621"/>
+                    <a:pt x="145415" y="4841621"/>
+                  </a:cubicBezTo>
+                  <a:lnTo>
+                    <a:pt x="6892798" y="4841621"/>
+                  </a:lnTo>
+                  <a:cubicBezTo>
+                    <a:pt x="6966077" y="4841621"/>
+                    <a:pt x="7025513" y="4782185"/>
+                    <a:pt x="7025513" y="4709033"/>
+                  </a:cubicBezTo>
+                  <a:lnTo>
+                    <a:pt x="7025513" y="145288"/>
+                  </a:lnTo>
+                  <a:cubicBezTo>
+                    <a:pt x="7025513" y="72136"/>
+                    <a:pt x="6966077" y="12700"/>
+                    <a:pt x="6892798" y="12700"/>
+                  </a:cubicBezTo>
+                  <a:lnTo>
+                    <a:pt x="145415" y="12700"/>
+                  </a:lnTo>
+                  <a:lnTo>
+                    <a:pt x="145415" y="6350"/>
+                  </a:lnTo>
+                  <a:lnTo>
+                    <a:pt x="145415" y="12700"/>
+                  </a:lnTo>
+                  <a:cubicBezTo>
+                    <a:pt x="72136" y="12700"/>
+                    <a:pt x="12700" y="72136"/>
+                    <a:pt x="12700" y="145288"/>
+                  </a:cubicBezTo>
+                  <a:close/>
+                </a:path>
+              </a:pathLst>
+            </a:custGeom>
+            <a:solidFill>
+              <a:srgbClr val="C8C9CF"/>
+            </a:solidFill>
+          </p:spPr>
+        </p:sp>
+      </p:grpSp>
+      <p:grpSp>
+        <p:nvGrpSpPr>
+          <p:cNvPr id="22" name="Group 22"/>
+          <p:cNvGrpSpPr/>
+          <p:nvPr/>
+        </p:nvGrpSpPr>
+        <p:grpSpPr>
+          <a:xfrm>
+            <a:off x="12283973" y="2751087"/>
+            <a:ext cx="744141" cy="744141"/>
+            <a:chOff x="0" y="0"/>
+            <a:chExt cx="992188" cy="992188"/>
+          </a:xfrm>
+        </p:grpSpPr>
+        <p:sp>
+          <p:nvSpPr>
+            <p:cNvPr id="23" name="Freeform 23" descr="preencoded.png"/>
+            <p:cNvSpPr/>
+            <p:nvPr/>
+          </p:nvSpPr>
+          <p:spPr>
+            <a:xfrm>
+              <a:off x="0" y="0"/>
+              <a:ext cx="992251" cy="992251"/>
+            </a:xfrm>
+            <a:custGeom>
+              <a:avLst/>
+              <a:gdLst/>
+              <a:ahLst/>
+              <a:cxnLst/>
+              <a:rect l="l" t="t" r="r" b="b"/>
+              <a:pathLst>
+                <a:path w="992251" h="992251">
+                  <a:moveTo>
+                    <a:pt x="0" y="0"/>
+                  </a:moveTo>
+                  <a:lnTo>
+                    <a:pt x="992251" y="0"/>
+                  </a:lnTo>
+                  <a:lnTo>
+                    <a:pt x="992251" y="992251"/>
+                  </a:lnTo>
+                  <a:lnTo>
+                    <a:pt x="0" y="992251"/>
+                  </a:lnTo>
+                  <a:lnTo>
+                    <a:pt x="0" y="0"/>
+                  </a:lnTo>
+                  <a:close/>
+                </a:path>
+              </a:pathLst>
+            </a:custGeom>
+            <a:blipFill>
+              <a:blip r:embed="rId9"/>
+              <a:stretch>
+                <a:fillRect r="6" b="6"/>
+              </a:stretch>
+            </a:blipFill>
+          </p:spPr>
+        </p:sp>
+      </p:grpSp>
+      <p:sp>
+        <p:nvSpPr>
+          <p:cNvPr id="24" name="Freeform 24" descr="preencoded.png"/>
+          <p:cNvSpPr/>
+          <p:nvPr/>
+        </p:nvSpPr>
+        <p:spPr>
+          <a:xfrm>
+            <a:off x="12488618" y="2955579"/>
+            <a:ext cx="334861" cy="334861"/>
+          </a:xfrm>
+          <a:custGeom>
+            <a:avLst/>
+            <a:gdLst/>
+            <a:ahLst/>
+            <a:cxnLst/>
+            <a:rect l="l" t="t" r="r" b="b"/>
+            <a:pathLst>
+              <a:path w="334861" h="334861">
+                <a:moveTo>
+                  <a:pt x="0" y="0"/>
+                </a:moveTo>
+                <a:lnTo>
+                  <a:pt x="334861" y="0"/>
+                </a:lnTo>
+                <a:lnTo>
+                  <a:pt x="334861" y="334861"/>
+                </a:lnTo>
+                <a:lnTo>
+                  <a:pt x="0" y="334861"/>
+                </a:lnTo>
+                <a:lnTo>
+                  <a:pt x="0" y="0"/>
+                </a:lnTo>
+                <a:close/>
+              </a:path>
+            </a:pathLst>
+          </a:custGeom>
+          <a:blipFill>
+            <a:blip r:embed="rId10">
+              <a:extLst>
+                <a:ext uri="{96DAC541-7B7A-43D3-8B79-37D633B846F1}">
+                  <asvg:svgBlip xmlns:asvg="http://schemas.microsoft.com/office/drawing/2016/SVG/main" r:embed="rId11"/>
+                </a:ext>
+              </a:extLst>
+            </a:blip>
+            <a:stretch>
+              <a:fillRect t="-8334" b="-8334"/>
+            </a:stretch>
+          </a:blipFill>
+        </p:spPr>
+      </p:sp>
+      <p:sp>
+        <p:nvSpPr>
+          <p:cNvPr id="25" name="TextBox 25"/>
+          <p:cNvSpPr txBox="1"/>
+          <p:nvPr/>
+        </p:nvSpPr>
+        <p:spPr>
+          <a:xfrm>
+            <a:off x="12283973" y="3733649"/>
+            <a:ext cx="4327627" cy="359714"/>
+          </a:xfrm>
+          <a:prstGeom prst="rect">
+            <a:avLst/>
+          </a:prstGeom>
+        </p:spPr>
+        <p:txBody>
+          <a:bodyPr wrap="square" lIns="0" tIns="0" rIns="0" bIns="0" rtlCol="0" anchor="t">
+            <a:spAutoFit/>
+          </a:bodyPr>
+          <a:lstStyle/>
+          <a:p>
+            <a:pPr algn="l">
+              <a:lnSpc>
+                <a:spcPts val="2999"/>
+              </a:lnSpc>
+            </a:pPr>
+            <a:r>
+              <a:rPr lang="en-US" sz="2437" b="1" dirty="0" err="1">
+                <a:solidFill>
+                  <a:srgbClr val="5B5F71"/>
+                </a:solidFill>
+                <a:latin typeface="Arimo Bold"/>
+                <a:ea typeface="Arimo Bold"/>
+                <a:cs typeface="Arimo Bold"/>
+                <a:sym typeface="Arimo Bold"/>
+              </a:rPr>
+              <a:t>Importancia</a:t>
+            </a:r>
+            <a:r>
+              <a:rPr lang="en-US" sz="2437" b="1" dirty="0">
+                <a:solidFill>
+                  <a:srgbClr val="5B5F71"/>
+                </a:solidFill>
+                <a:latin typeface="Arimo Bold"/>
+                <a:ea typeface="Arimo Bold"/>
+                <a:cs typeface="Arimo Bold"/>
+                <a:sym typeface="Arimo Bold"/>
+              </a:rPr>
+              <a:t> de las </a:t>
+            </a:r>
+            <a:r>
+              <a:rPr lang="en-US" sz="2437" b="1" dirty="0" err="1">
+                <a:solidFill>
+                  <a:srgbClr val="5B5F71"/>
+                </a:solidFill>
+                <a:latin typeface="Arimo Bold"/>
+                <a:ea typeface="Arimo Bold"/>
+                <a:cs typeface="Arimo Bold"/>
+                <a:sym typeface="Arimo Bold"/>
+              </a:rPr>
+              <a:t>reglas</a:t>
+            </a:r>
+            <a:endParaRPr lang="en-US" sz="2437" b="1" dirty="0">
+              <a:solidFill>
+                <a:srgbClr val="5B5F71"/>
+              </a:solidFill>
+              <a:latin typeface="Arimo Bold"/>
+              <a:ea typeface="Arimo Bold"/>
+              <a:cs typeface="Arimo Bold"/>
+              <a:sym typeface="Arimo Bold"/>
+            </a:endParaRPr>
+          </a:p>
+        </p:txBody>
+      </p:sp>
+      <p:sp>
+        <p:nvSpPr>
+          <p:cNvPr id="26" name="TextBox 26"/>
+          <p:cNvSpPr txBox="1"/>
+          <p:nvPr/>
+        </p:nvSpPr>
+        <p:spPr>
+          <a:xfrm>
+            <a:off x="12283973" y="4184447"/>
+            <a:ext cx="4754166" cy="1286027"/>
+          </a:xfrm>
+          <a:prstGeom prst="rect">
+            <a:avLst/>
+          </a:prstGeom>
+        </p:spPr>
+        <p:txBody>
+          <a:bodyPr lIns="0" tIns="0" rIns="0" bIns="0" rtlCol="0" anchor="t">
+            <a:spAutoFit/>
+          </a:bodyPr>
+          <a:lstStyle/>
+          <a:p>
+            <a:pPr algn="l">
+              <a:lnSpc>
+                <a:spcPts val="3125"/>
+              </a:lnSpc>
+            </a:pPr>
+            <a:r>
+              <a:rPr lang="en-US" sz="1937">
+                <a:solidFill>
+                  <a:srgbClr val="5B5F71"/>
+                </a:solidFill>
+                <a:latin typeface="Arimo"/>
+                <a:ea typeface="Arimo"/>
+                <a:cs typeface="Arimo"/>
+                <a:sym typeface="Arimo"/>
+              </a:rPr>
+              <a:t>Se entendió la importancia de seguir las reglas del lenguaje de programación para evitar errores</a:t>
+            </a:r>
+          </a:p>
+        </p:txBody>
+      </p:sp>
+      <p:sp>
+        <p:nvSpPr>
+          <p:cNvPr id="27" name="TextBox 27"/>
+          <p:cNvSpPr txBox="1"/>
+          <p:nvPr/>
+        </p:nvSpPr>
+        <p:spPr>
+          <a:xfrm>
+            <a:off x="992238" y="6308674"/>
+            <a:ext cx="16303523" cy="1286027"/>
+          </a:xfrm>
+          <a:prstGeom prst="rect">
+            <a:avLst/>
+          </a:prstGeom>
+        </p:spPr>
+        <p:txBody>
+          <a:bodyPr lIns="0" tIns="0" rIns="0" bIns="0" rtlCol="0" anchor="t">
+            <a:spAutoFit/>
+          </a:bodyPr>
+          <a:lstStyle/>
+          <a:p>
+            <a:pPr algn="l">
+              <a:lnSpc>
+                <a:spcPts val="3125"/>
+              </a:lnSpc>
+            </a:pPr>
+            <a:r>
+              <a:rPr lang="en-US" sz="1937">
+                <a:solidFill>
+                  <a:srgbClr val="5B5F71"/>
+                </a:solidFill>
+                <a:latin typeface="Arimo"/>
+                <a:ea typeface="Arimo"/>
+                <a:cs typeface="Arimo"/>
+                <a:sym typeface="Arimo"/>
+              </a:rPr>
+              <a:t>La realización de estos ejercicios permitió comprender de manera más clara cómo funciona el análisis léxico dentro del proceso de compilación. A través de la identificación práctica de tokens, lexemas y errores léxicos, fue posible observar cómo el compilador interpreta cada elemento del código fuente.</a:t>
+            </a:r>
+          </a:p>
+        </p:txBody>
+      </p:sp>
+      <p:sp>
+        <p:nvSpPr>
+          <p:cNvPr id="28" name="TextBox 28"/>
+          <p:cNvSpPr txBox="1"/>
+          <p:nvPr/>
+        </p:nvSpPr>
+        <p:spPr>
+          <a:xfrm>
+            <a:off x="992238" y="7778506"/>
+            <a:ext cx="16303523" cy="1286027"/>
+          </a:xfrm>
+          <a:prstGeom prst="rect">
+            <a:avLst/>
+          </a:prstGeom>
+        </p:spPr>
+        <p:txBody>
+          <a:bodyPr lIns="0" tIns="0" rIns="0" bIns="0" rtlCol="0" anchor="t">
+            <a:spAutoFit/>
+          </a:bodyPr>
+          <a:lstStyle/>
+          <a:p>
+            <a:pPr algn="l">
+              <a:lnSpc>
+                <a:spcPts val="3125"/>
+              </a:lnSpc>
+            </a:pPr>
+            <a:r>
+              <a:rPr lang="en-US" sz="1937">
+                <a:solidFill>
+                  <a:srgbClr val="5B5F71"/>
+                </a:solidFill>
+                <a:latin typeface="Arimo"/>
+                <a:ea typeface="Arimo"/>
+                <a:cs typeface="Arimo"/>
+                <a:sym typeface="Arimo"/>
+              </a:rPr>
+              <a:t>Además, estos ejercicios ayudan a entender la importancia de seguir las reglas del lenguaje de programación, ya que cualquier error léxico puede provocar que el código no sea interpretado correctamente. Esta actividad permitió reforzar los conceptos teóricos mediante ejemplos prácticos que muestran el funcionamiento básico del análisis léxico.</a:t>
+            </a:r>
+          </a:p>
+        </p:txBody>
+      </p:sp>
+    </p:spTree>
+  </p:cSld>
+  <p:clrMapOvr>
+    <a:masterClrMapping/>
+  </p:clrMapOvr>
+</p:sld>
+</file>
+
+<file path=ppt/slides/slide11.xml><?xml version="1.0" encoding="utf-8"?>
+<p:sld xmlns:a="http://schemas.openxmlformats.org/drawingml/2006/main" xmlns:r="http://schemas.openxmlformats.org/officeDocument/2006/relationships" xmlns:p="http://schemas.openxmlformats.org/presentationml/2006/main">
+  <p:cSld>
+    <p:spTree>
+      <p:nvGrpSpPr>
+        <p:cNvPr id="1" name=""/>
+        <p:cNvGrpSpPr/>
+        <p:nvPr/>
+      </p:nvGrpSpPr>
+      <p:grpSpPr>
+        <a:xfrm>
+          <a:off x="0" y="0"/>
+          <a:ext cx="0" cy="0"/>
+          <a:chOff x="0" y="0"/>
+          <a:chExt cx="0" cy="0"/>
+        </a:xfrm>
+      </p:grpSpPr>
+      <p:sp>
+        <p:nvSpPr>
+          <p:cNvPr id="2" name="TextBox 2"/>
+          <p:cNvSpPr txBox="1"/>
+          <p:nvPr/>
+        </p:nvSpPr>
+        <p:spPr>
+          <a:xfrm>
             <a:off x="1053177" y="846830"/>
             <a:ext cx="12809981" cy="773112"/>
           </a:xfrm>
@@ -6519,47 +8238,6 @@
           </a:p>
         </p:txBody>
       </p:sp>
-      <p:sp>
-        <p:nvSpPr>
-          <p:cNvPr id="8" name="TextBox 8"/>
-          <p:cNvSpPr txBox="1"/>
-          <p:nvPr/>
-        </p:nvSpPr>
-        <p:spPr>
-          <a:xfrm>
-            <a:off x="1526899" y="3295650"/>
-            <a:ext cx="15234202" cy="774700"/>
-          </a:xfrm>
-          <a:prstGeom prst="rect">
-            <a:avLst/>
-          </a:prstGeom>
-        </p:spPr>
-        <p:txBody>
-          <a:bodyPr lIns="0" tIns="0" rIns="0" bIns="0" rtlCol="0" anchor="t">
-            <a:spAutoFit/>
-          </a:bodyPr>
-          <a:lstStyle/>
-          <a:p>
-            <a:pPr algn="l">
-              <a:lnSpc>
-                <a:spcPts val="3125"/>
-              </a:lnSpc>
-            </a:pPr>
-            <a:r>
-              <a:rPr lang="en-US" sz="1937">
-                <a:solidFill>
-                  <a:srgbClr val="5B5F71"/>
-                </a:solidFill>
-                <a:latin typeface="Arimo"/>
-                <a:ea typeface="Arimo"/>
-                <a:cs typeface="Arimo"/>
-                <a:sym typeface="Arimo"/>
-              </a:rPr>
-              <a:t>Esta obra clásica proporciona una fundamentación teórica completa sobre el diseño y construcción de compiladores, incluyendo el análisis léxico.</a:t>
-            </a:r>
-          </a:p>
-        </p:txBody>
-      </p:sp>
       <p:grpSp>
         <p:nvGrpSpPr>
           <p:cNvPr id="9" name="Group 9"/>
@@ -6877,47 +8555,6 @@
           </a:p>
         </p:txBody>
       </p:sp>
-      <p:sp>
-        <p:nvSpPr>
-          <p:cNvPr id="14" name="TextBox 14"/>
-          <p:cNvSpPr txBox="1"/>
-          <p:nvPr/>
-        </p:nvSpPr>
-        <p:spPr>
-          <a:xfrm>
-            <a:off x="1526899" y="6369691"/>
-            <a:ext cx="15234202" cy="384175"/>
-          </a:xfrm>
-          <a:prstGeom prst="rect">
-            <a:avLst/>
-          </a:prstGeom>
-        </p:spPr>
-        <p:txBody>
-          <a:bodyPr lIns="0" tIns="0" rIns="0" bIns="0" rtlCol="0" anchor="t">
-            <a:spAutoFit/>
-          </a:bodyPr>
-          <a:lstStyle/>
-          <a:p>
-            <a:pPr algn="l">
-              <a:lnSpc>
-                <a:spcPts val="3125"/>
-              </a:lnSpc>
-            </a:pPr>
-            <a:r>
-              <a:rPr lang="en-US" sz="1937">
-                <a:solidFill>
-                  <a:srgbClr val="5B5F71"/>
-                </a:solidFill>
-                <a:latin typeface="Arimo"/>
-                <a:ea typeface="Arimo"/>
-                <a:cs typeface="Arimo"/>
-                <a:sym typeface="Arimo"/>
-              </a:rPr>
-              <a:t>Este libro ofrece una perspectiva matemática sobre los autómatas que forman la base del análisis léxico en compiladores.</a:t>
-            </a:r>
-          </a:p>
-        </p:txBody>
-      </p:sp>
     </p:spTree>
   </p:cSld>
   <p:clrMapOvr>
@@ -22492,32 +24129,32 @@
       </p:grpSpPr>
       <p:sp>
         <p:nvSpPr>
-          <p:cNvPr id="2" name="TextBox 2"/>
+          <p:cNvPr id="33" name="TextBox 33"/>
           <p:cNvSpPr txBox="1"/>
           <p:nvPr/>
         </p:nvSpPr>
         <p:spPr>
           <a:xfrm>
-            <a:off x="992238" y="1184377"/>
-            <a:ext cx="6202261" cy="813197"/>
+            <a:off x="619705" y="300628"/>
+            <a:ext cx="8337976" cy="500650"/>
           </a:xfrm>
           <a:prstGeom prst="rect">
             <a:avLst/>
           </a:prstGeom>
         </p:spPr>
         <p:txBody>
-          <a:bodyPr lIns="0" tIns="0" rIns="0" bIns="0" rtlCol="0" anchor="t">
+          <a:bodyPr wrap="square" lIns="0" tIns="0" rIns="0" bIns="0" rtlCol="0" anchor="t">
             <a:spAutoFit/>
           </a:bodyPr>
           <a:lstStyle/>
           <a:p>
             <a:pPr algn="l">
               <a:lnSpc>
-                <a:spcPts val="6062"/>
+                <a:spcPts val="4187"/>
               </a:lnSpc>
             </a:pPr>
             <a:r>
-              <a:rPr lang="en-US" sz="4875" b="1">
+              <a:rPr lang="en-US" sz="3312" b="1" dirty="0">
                 <a:solidFill>
                   <a:srgbClr val="505468"/>
                 </a:solidFill>
@@ -22526,1441 +24163,82 @@
                 <a:cs typeface="Arimo Bold"/>
                 <a:sym typeface="Arimo Bold"/>
               </a:rPr>
-              <a:t>Conclusión</a:t>
-            </a:r>
-          </a:p>
-        </p:txBody>
-      </p:sp>
-      <p:grpSp>
-        <p:nvGrpSpPr>
-          <p:cNvPr id="3" name="Group 3"/>
-          <p:cNvGrpSpPr/>
-          <p:nvPr/>
-        </p:nvGrpSpPr>
-        <p:grpSpPr>
-          <a:xfrm>
-            <a:off x="987476" y="2488854"/>
-            <a:ext cx="5278641" cy="3640779"/>
-            <a:chOff x="0" y="0"/>
-            <a:chExt cx="7038188" cy="4854372"/>
-          </a:xfrm>
-        </p:grpSpPr>
-        <p:sp>
-          <p:nvSpPr>
-            <p:cNvPr id="4" name="Freeform 4"/>
-            <p:cNvSpPr/>
-            <p:nvPr/>
-          </p:nvSpPr>
-          <p:spPr>
-            <a:xfrm>
-              <a:off x="6350" y="6350"/>
-              <a:ext cx="7025513" cy="4841621"/>
-            </a:xfrm>
-            <a:custGeom>
-              <a:avLst/>
-              <a:gdLst/>
-              <a:ahLst/>
-              <a:cxnLst/>
-              <a:rect l="l" t="t" r="r" b="b"/>
-              <a:pathLst>
-                <a:path w="7025513" h="4841621">
-                  <a:moveTo>
-                    <a:pt x="0" y="138938"/>
-                  </a:moveTo>
-                  <a:cubicBezTo>
-                    <a:pt x="0" y="62230"/>
-                    <a:pt x="62230" y="0"/>
-                    <a:pt x="139065" y="0"/>
-                  </a:cubicBezTo>
-                  <a:lnTo>
-                    <a:pt x="6886448" y="0"/>
-                  </a:lnTo>
-                  <a:cubicBezTo>
-                    <a:pt x="6963283" y="0"/>
-                    <a:pt x="7025513" y="62230"/>
-                    <a:pt x="7025513" y="138938"/>
-                  </a:cubicBezTo>
-                  <a:lnTo>
-                    <a:pt x="7025513" y="4702683"/>
-                  </a:lnTo>
-                  <a:cubicBezTo>
-                    <a:pt x="7025513" y="4779391"/>
-                    <a:pt x="6963283" y="4841621"/>
-                    <a:pt x="6886448" y="4841621"/>
-                  </a:cubicBezTo>
-                  <a:lnTo>
-                    <a:pt x="139065" y="4841621"/>
-                  </a:lnTo>
-                  <a:cubicBezTo>
-                    <a:pt x="62230" y="4841621"/>
-                    <a:pt x="0" y="4779518"/>
-                    <a:pt x="0" y="4702683"/>
-                  </a:cubicBezTo>
-                  <a:close/>
-                </a:path>
-              </a:pathLst>
-            </a:custGeom>
-            <a:solidFill>
-              <a:srgbClr val="E2E3E9"/>
-            </a:solidFill>
-          </p:spPr>
-        </p:sp>
-        <p:sp>
-          <p:nvSpPr>
-            <p:cNvPr id="5" name="Freeform 5"/>
-            <p:cNvSpPr/>
-            <p:nvPr/>
-          </p:nvSpPr>
-          <p:spPr>
-            <a:xfrm>
-              <a:off x="0" y="0"/>
-              <a:ext cx="7038213" cy="4854321"/>
-            </a:xfrm>
-            <a:custGeom>
-              <a:avLst/>
-              <a:gdLst/>
-              <a:ahLst/>
-              <a:cxnLst/>
-              <a:rect l="l" t="t" r="r" b="b"/>
-              <a:pathLst>
-                <a:path w="7038213" h="4854321">
-                  <a:moveTo>
-                    <a:pt x="0" y="145288"/>
-                  </a:moveTo>
-                  <a:cubicBezTo>
-                    <a:pt x="0" y="65024"/>
-                    <a:pt x="65151" y="0"/>
-                    <a:pt x="145415" y="0"/>
-                  </a:cubicBezTo>
-                  <a:lnTo>
-                    <a:pt x="6892798" y="0"/>
-                  </a:lnTo>
-                  <a:lnTo>
-                    <a:pt x="6892798" y="6350"/>
-                  </a:lnTo>
-                  <a:lnTo>
-                    <a:pt x="6892798" y="0"/>
-                  </a:lnTo>
-                  <a:cubicBezTo>
-                    <a:pt x="6973062" y="0"/>
-                    <a:pt x="7038213" y="65024"/>
-                    <a:pt x="7038213" y="145288"/>
-                  </a:cubicBezTo>
-                  <a:lnTo>
-                    <a:pt x="7031863" y="145288"/>
-                  </a:lnTo>
-                  <a:lnTo>
-                    <a:pt x="7038213" y="145288"/>
-                  </a:lnTo>
-                  <a:lnTo>
-                    <a:pt x="7038213" y="4709033"/>
-                  </a:lnTo>
-                  <a:lnTo>
-                    <a:pt x="7031863" y="4709033"/>
-                  </a:lnTo>
-                  <a:lnTo>
-                    <a:pt x="7038213" y="4709033"/>
-                  </a:lnTo>
-                  <a:cubicBezTo>
-                    <a:pt x="7038213" y="4789297"/>
-                    <a:pt x="6973062" y="4854321"/>
-                    <a:pt x="6892798" y="4854321"/>
-                  </a:cubicBezTo>
-                  <a:lnTo>
-                    <a:pt x="6892798" y="4847971"/>
-                  </a:lnTo>
-                  <a:lnTo>
-                    <a:pt x="6892798" y="4854321"/>
-                  </a:lnTo>
-                  <a:lnTo>
-                    <a:pt x="145415" y="4854321"/>
-                  </a:lnTo>
-                  <a:lnTo>
-                    <a:pt x="145415" y="4847971"/>
-                  </a:lnTo>
-                  <a:lnTo>
-                    <a:pt x="145415" y="4854321"/>
-                  </a:lnTo>
-                  <a:cubicBezTo>
-                    <a:pt x="65151" y="4854321"/>
-                    <a:pt x="0" y="4789297"/>
-                    <a:pt x="0" y="4709033"/>
-                  </a:cubicBezTo>
-                  <a:lnTo>
-                    <a:pt x="0" y="145288"/>
-                  </a:lnTo>
-                  <a:lnTo>
-                    <a:pt x="6350" y="145288"/>
-                  </a:lnTo>
-                  <a:lnTo>
-                    <a:pt x="0" y="145288"/>
-                  </a:lnTo>
-                  <a:moveTo>
-                    <a:pt x="12700" y="145288"/>
-                  </a:moveTo>
-                  <a:lnTo>
-                    <a:pt x="12700" y="4709033"/>
-                  </a:lnTo>
-                  <a:lnTo>
-                    <a:pt x="6350" y="4709033"/>
-                  </a:lnTo>
-                  <a:lnTo>
-                    <a:pt x="12700" y="4709033"/>
-                  </a:lnTo>
-                  <a:cubicBezTo>
-                    <a:pt x="12700" y="4782312"/>
-                    <a:pt x="72136" y="4841621"/>
-                    <a:pt x="145415" y="4841621"/>
-                  </a:cubicBezTo>
-                  <a:lnTo>
-                    <a:pt x="6892798" y="4841621"/>
-                  </a:lnTo>
-                  <a:cubicBezTo>
-                    <a:pt x="6966077" y="4841621"/>
-                    <a:pt x="7025513" y="4782185"/>
-                    <a:pt x="7025513" y="4709033"/>
-                  </a:cubicBezTo>
-                  <a:lnTo>
-                    <a:pt x="7025513" y="145288"/>
-                  </a:lnTo>
-                  <a:cubicBezTo>
-                    <a:pt x="7025513" y="72136"/>
-                    <a:pt x="6966077" y="12700"/>
-                    <a:pt x="6892798" y="12700"/>
-                  </a:cubicBezTo>
-                  <a:lnTo>
-                    <a:pt x="145415" y="12700"/>
-                  </a:lnTo>
-                  <a:lnTo>
-                    <a:pt x="145415" y="6350"/>
-                  </a:lnTo>
-                  <a:lnTo>
-                    <a:pt x="145415" y="12700"/>
-                  </a:lnTo>
-                  <a:cubicBezTo>
-                    <a:pt x="72136" y="12700"/>
-                    <a:pt x="12700" y="72136"/>
-                    <a:pt x="12700" y="145288"/>
-                  </a:cubicBezTo>
-                  <a:close/>
-                </a:path>
-              </a:pathLst>
-            </a:custGeom>
-            <a:solidFill>
-              <a:srgbClr val="C8C9CF"/>
-            </a:solidFill>
-          </p:spPr>
-        </p:sp>
-      </p:grpSp>
-      <p:grpSp>
-        <p:nvGrpSpPr>
-          <p:cNvPr id="6" name="Group 6"/>
-          <p:cNvGrpSpPr/>
-          <p:nvPr/>
-        </p:nvGrpSpPr>
-        <p:grpSpPr>
-          <a:xfrm>
-            <a:off x="1249709" y="2751087"/>
-            <a:ext cx="744141" cy="744141"/>
-            <a:chOff x="0" y="0"/>
-            <a:chExt cx="992188" cy="992188"/>
-          </a:xfrm>
-        </p:grpSpPr>
-        <p:sp>
-          <p:nvSpPr>
-            <p:cNvPr id="7" name="Freeform 7" descr="preencoded.png"/>
-            <p:cNvSpPr/>
-            <p:nvPr/>
-          </p:nvSpPr>
-          <p:spPr>
-            <a:xfrm>
-              <a:off x="0" y="0"/>
-              <a:ext cx="992251" cy="992251"/>
-            </a:xfrm>
-            <a:custGeom>
-              <a:avLst/>
-              <a:gdLst/>
-              <a:ahLst/>
-              <a:cxnLst/>
-              <a:rect l="l" t="t" r="r" b="b"/>
-              <a:pathLst>
-                <a:path w="992251" h="992251">
-                  <a:moveTo>
-                    <a:pt x="0" y="0"/>
-                  </a:moveTo>
-                  <a:lnTo>
-                    <a:pt x="992251" y="0"/>
-                  </a:lnTo>
-                  <a:lnTo>
-                    <a:pt x="992251" y="992251"/>
-                  </a:lnTo>
-                  <a:lnTo>
-                    <a:pt x="0" y="992251"/>
-                  </a:lnTo>
-                  <a:lnTo>
-                    <a:pt x="0" y="0"/>
-                  </a:lnTo>
-                  <a:close/>
-                </a:path>
-              </a:pathLst>
-            </a:custGeom>
-            <a:blipFill>
-              <a:blip r:embed="rId3"/>
-              <a:stretch>
-                <a:fillRect r="6" b="6"/>
-              </a:stretch>
-            </a:blipFill>
-          </p:spPr>
-        </p:sp>
-      </p:grpSp>
-      <p:sp>
-        <p:nvSpPr>
-          <p:cNvPr id="8" name="Freeform 8" descr="preencoded.png"/>
-          <p:cNvSpPr/>
-          <p:nvPr/>
-        </p:nvSpPr>
-        <p:spPr>
-          <a:xfrm>
-            <a:off x="1454353" y="2955579"/>
-            <a:ext cx="334861" cy="334861"/>
-          </a:xfrm>
-          <a:custGeom>
-            <a:avLst/>
-            <a:gdLst/>
-            <a:ahLst/>
-            <a:cxnLst/>
-            <a:rect l="l" t="t" r="r" b="b"/>
-            <a:pathLst>
-              <a:path w="334861" h="334861">
-                <a:moveTo>
-                  <a:pt x="0" y="0"/>
-                </a:moveTo>
-                <a:lnTo>
-                  <a:pt x="334861" y="0"/>
-                </a:lnTo>
-                <a:lnTo>
-                  <a:pt x="334861" y="334861"/>
-                </a:lnTo>
-                <a:lnTo>
-                  <a:pt x="0" y="334861"/>
-                </a:lnTo>
-                <a:lnTo>
-                  <a:pt x="0" y="0"/>
-                </a:lnTo>
-                <a:close/>
-              </a:path>
-            </a:pathLst>
-          </a:custGeom>
-          <a:blipFill>
-            <a:blip r:embed="rId4">
-              <a:extLst>
-                <a:ext uri="{96DAC541-7B7A-43D3-8B79-37D633B846F1}">
-                  <asvg:svgBlip xmlns:asvg="http://schemas.microsoft.com/office/drawing/2016/SVG/main" r:embed="rId5"/>
-                </a:ext>
-              </a:extLst>
-            </a:blip>
-            <a:stretch>
-              <a:fillRect t="-18056" b="-18056"/>
-            </a:stretch>
-          </a:blipFill>
-        </p:spPr>
-      </p:sp>
-      <p:sp>
-        <p:nvSpPr>
-          <p:cNvPr id="9" name="TextBox 9"/>
-          <p:cNvSpPr txBox="1"/>
-          <p:nvPr/>
-        </p:nvSpPr>
-        <p:spPr>
-          <a:xfrm>
-            <a:off x="1249709" y="3733648"/>
-            <a:ext cx="4533338" cy="359714"/>
-          </a:xfrm>
-          <a:prstGeom prst="rect">
-            <a:avLst/>
-          </a:prstGeom>
-        </p:spPr>
-        <p:txBody>
-          <a:bodyPr wrap="square" lIns="0" tIns="0" rIns="0" bIns="0" rtlCol="0" anchor="t">
-            <a:spAutoFit/>
-          </a:bodyPr>
-          <a:lstStyle/>
-          <a:p>
-            <a:pPr algn="l">
-              <a:lnSpc>
-                <a:spcPts val="2999"/>
-              </a:lnSpc>
-            </a:pPr>
-            <a:r>
-              <a:rPr lang="en-US" sz="2437" b="1" dirty="0" err="1">
-                <a:solidFill>
-                  <a:srgbClr val="5B5F71"/>
+              <a:t>Link de </a:t>
+            </a:r>
+            <a:r>
+              <a:rPr lang="en-US" sz="3312" b="1" dirty="0" err="1">
+                <a:solidFill>
+                  <a:srgbClr val="505468"/>
                 </a:solidFill>
                 <a:latin typeface="Arimo Bold"/>
                 <a:ea typeface="Arimo Bold"/>
                 <a:cs typeface="Arimo Bold"/>
                 <a:sym typeface="Arimo Bold"/>
               </a:rPr>
-              <a:t>Comprensión</a:t>
-            </a:r>
-            <a:r>
-              <a:rPr lang="en-US" sz="2437" b="1" dirty="0">
-                <a:solidFill>
-                  <a:srgbClr val="5B5F71"/>
+              <a:t>Repositorio</a:t>
+            </a:r>
+            <a:r>
+              <a:rPr lang="en-US" sz="3312" b="1" dirty="0">
+                <a:solidFill>
+                  <a:srgbClr val="505468"/>
                 </a:solidFill>
                 <a:latin typeface="Arimo Bold"/>
                 <a:ea typeface="Arimo Bold"/>
                 <a:cs typeface="Arimo Bold"/>
                 <a:sym typeface="Arimo Bold"/>
               </a:rPr>
-              <a:t> del </a:t>
-            </a:r>
-            <a:r>
-              <a:rPr lang="en-US" sz="2437" b="1" dirty="0" err="1">
-                <a:solidFill>
-                  <a:srgbClr val="5B5F71"/>
-                </a:solidFill>
-                <a:latin typeface="Arimo Bold"/>
-                <a:ea typeface="Arimo Bold"/>
-                <a:cs typeface="Arimo Bold"/>
-                <a:sym typeface="Arimo Bold"/>
-              </a:rPr>
-              <a:t>proceso</a:t>
-            </a:r>
-            <a:endParaRPr lang="en-US" sz="2437" b="1" dirty="0">
-              <a:solidFill>
-                <a:srgbClr val="5B5F71"/>
-              </a:solidFill>
-              <a:latin typeface="Arimo Bold"/>
-              <a:ea typeface="Arimo Bold"/>
-              <a:cs typeface="Arimo Bold"/>
-              <a:sym typeface="Arimo Bold"/>
-            </a:endParaRPr>
-          </a:p>
-        </p:txBody>
-      </p:sp>
-      <p:sp>
-        <p:nvSpPr>
-          <p:cNvPr id="10" name="TextBox 10"/>
+              <a:t> </a:t>
+            </a:r>
+          </a:p>
+        </p:txBody>
+      </p:sp>
+      <p:sp>
+        <p:nvSpPr>
+          <p:cNvPr id="65" name="CuadroTexto 64">
+            <a:extLst>
+              <a:ext uri="{FF2B5EF4-FFF2-40B4-BE49-F238E27FC236}">
+                <a16:creationId xmlns:a16="http://schemas.microsoft.com/office/drawing/2014/main" id="{4B9366A9-73F0-5EDD-2C82-C952BF0D867D}"/>
+              </a:ext>
+            </a:extLst>
+          </p:cNvPr>
           <p:cNvSpPr txBox="1"/>
           <p:nvPr/>
         </p:nvSpPr>
         <p:spPr>
           <a:xfrm>
-            <a:off x="1249709" y="4184447"/>
-            <a:ext cx="4754166" cy="1682953"/>
+            <a:off x="619704" y="1181100"/>
+            <a:ext cx="17439696" cy="954107"/>
           </a:xfrm>
           <a:prstGeom prst="rect">
             <a:avLst/>
           </a:prstGeom>
+          <a:noFill/>
         </p:spPr>
         <p:txBody>
-          <a:bodyPr lIns="0" tIns="0" rIns="0" bIns="0" rtlCol="0" anchor="t">
+          <a:bodyPr wrap="square">
             <a:spAutoFit/>
           </a:bodyPr>
           <a:lstStyle/>
           <a:p>
-            <a:pPr algn="l">
-              <a:lnSpc>
-                <a:spcPts val="3125"/>
-              </a:lnSpc>
-            </a:pPr>
-            <a:r>
-              <a:rPr lang="en-US" sz="1937">
-                <a:solidFill>
-                  <a:srgbClr val="5B5F71"/>
-                </a:solidFill>
-                <a:latin typeface="Arimo"/>
-                <a:ea typeface="Arimo"/>
-                <a:cs typeface="Arimo"/>
-                <a:sym typeface="Arimo"/>
-              </a:rPr>
-              <a:t>Los ejercicios permitieron comprender cómo funciona el análisis léxico dentro del proceso de compilación de un programa</a:t>
-            </a:r>
-          </a:p>
-        </p:txBody>
-      </p:sp>
-      <p:grpSp>
-        <p:nvGrpSpPr>
-          <p:cNvPr id="11" name="Group 11"/>
-          <p:cNvGrpSpPr/>
-          <p:nvPr/>
-        </p:nvGrpSpPr>
-        <p:grpSpPr>
-          <a:xfrm>
-            <a:off x="6504537" y="2488854"/>
-            <a:ext cx="5278784" cy="3640779"/>
-            <a:chOff x="0" y="0"/>
-            <a:chExt cx="7038378" cy="4854372"/>
-          </a:xfrm>
-        </p:grpSpPr>
-        <p:sp>
-          <p:nvSpPr>
-            <p:cNvPr id="12" name="Freeform 12"/>
-            <p:cNvSpPr/>
-            <p:nvPr/>
-          </p:nvSpPr>
-          <p:spPr>
-            <a:xfrm>
-              <a:off x="6350" y="6350"/>
-              <a:ext cx="7025640" cy="4841621"/>
-            </a:xfrm>
-            <a:custGeom>
-              <a:avLst/>
-              <a:gdLst/>
-              <a:ahLst/>
-              <a:cxnLst/>
-              <a:rect l="l" t="t" r="r" b="b"/>
-              <a:pathLst>
-                <a:path w="7025640" h="4841621">
-                  <a:moveTo>
-                    <a:pt x="0" y="138938"/>
-                  </a:moveTo>
-                  <a:cubicBezTo>
-                    <a:pt x="0" y="62230"/>
-                    <a:pt x="62230" y="0"/>
-                    <a:pt x="139065" y="0"/>
-                  </a:cubicBezTo>
-                  <a:lnTo>
-                    <a:pt x="6886575" y="0"/>
-                  </a:lnTo>
-                  <a:cubicBezTo>
-                    <a:pt x="6963410" y="0"/>
-                    <a:pt x="7025640" y="62230"/>
-                    <a:pt x="7025640" y="138938"/>
-                  </a:cubicBezTo>
-                  <a:lnTo>
-                    <a:pt x="7025640" y="4702683"/>
-                  </a:lnTo>
-                  <a:cubicBezTo>
-                    <a:pt x="7025640" y="4779391"/>
-                    <a:pt x="6963410" y="4841621"/>
-                    <a:pt x="6886575" y="4841621"/>
-                  </a:cubicBezTo>
-                  <a:lnTo>
-                    <a:pt x="139065" y="4841621"/>
-                  </a:lnTo>
-                  <a:cubicBezTo>
-                    <a:pt x="62230" y="4841621"/>
-                    <a:pt x="0" y="4779518"/>
-                    <a:pt x="0" y="4702683"/>
-                  </a:cubicBezTo>
-                  <a:close/>
-                </a:path>
-              </a:pathLst>
-            </a:custGeom>
-            <a:solidFill>
-              <a:srgbClr val="E2E3E9"/>
-            </a:solidFill>
-          </p:spPr>
-        </p:sp>
-        <p:sp>
-          <p:nvSpPr>
-            <p:cNvPr id="13" name="Freeform 13"/>
-            <p:cNvSpPr/>
-            <p:nvPr/>
-          </p:nvSpPr>
-          <p:spPr>
-            <a:xfrm>
-              <a:off x="0" y="0"/>
-              <a:ext cx="7038340" cy="4854321"/>
-            </a:xfrm>
-            <a:custGeom>
-              <a:avLst/>
-              <a:gdLst/>
-              <a:ahLst/>
-              <a:cxnLst/>
-              <a:rect l="l" t="t" r="r" b="b"/>
-              <a:pathLst>
-                <a:path w="7038340" h="4854321">
-                  <a:moveTo>
-                    <a:pt x="0" y="145288"/>
-                  </a:moveTo>
-                  <a:cubicBezTo>
-                    <a:pt x="0" y="65024"/>
-                    <a:pt x="65151" y="0"/>
-                    <a:pt x="145415" y="0"/>
-                  </a:cubicBezTo>
-                  <a:lnTo>
-                    <a:pt x="6892925" y="0"/>
-                  </a:lnTo>
-                  <a:lnTo>
-                    <a:pt x="6892925" y="6350"/>
-                  </a:lnTo>
-                  <a:lnTo>
-                    <a:pt x="6892925" y="0"/>
-                  </a:lnTo>
-                  <a:cubicBezTo>
-                    <a:pt x="6973189" y="0"/>
-                    <a:pt x="7038340" y="65024"/>
-                    <a:pt x="7038340" y="145288"/>
-                  </a:cubicBezTo>
-                  <a:lnTo>
-                    <a:pt x="7031990" y="145288"/>
-                  </a:lnTo>
-                  <a:lnTo>
-                    <a:pt x="7038340" y="145288"/>
-                  </a:lnTo>
-                  <a:lnTo>
-                    <a:pt x="7038340" y="4709033"/>
-                  </a:lnTo>
-                  <a:lnTo>
-                    <a:pt x="7031990" y="4709033"/>
-                  </a:lnTo>
-                  <a:lnTo>
-                    <a:pt x="7038340" y="4709033"/>
-                  </a:lnTo>
-                  <a:cubicBezTo>
-                    <a:pt x="7038340" y="4789297"/>
-                    <a:pt x="6973189" y="4854321"/>
-                    <a:pt x="6892925" y="4854321"/>
-                  </a:cubicBezTo>
-                  <a:lnTo>
-                    <a:pt x="6892925" y="4847971"/>
-                  </a:lnTo>
-                  <a:lnTo>
-                    <a:pt x="6892925" y="4854321"/>
-                  </a:lnTo>
-                  <a:lnTo>
-                    <a:pt x="145415" y="4854321"/>
-                  </a:lnTo>
-                  <a:lnTo>
-                    <a:pt x="145415" y="4847971"/>
-                  </a:lnTo>
-                  <a:lnTo>
-                    <a:pt x="145415" y="4854321"/>
-                  </a:lnTo>
-                  <a:cubicBezTo>
-                    <a:pt x="65151" y="4854321"/>
-                    <a:pt x="0" y="4789297"/>
-                    <a:pt x="0" y="4709033"/>
-                  </a:cubicBezTo>
-                  <a:lnTo>
-                    <a:pt x="0" y="145288"/>
-                  </a:lnTo>
-                  <a:lnTo>
-                    <a:pt x="6350" y="145288"/>
-                  </a:lnTo>
-                  <a:lnTo>
-                    <a:pt x="0" y="145288"/>
-                  </a:lnTo>
-                  <a:moveTo>
-                    <a:pt x="12700" y="145288"/>
-                  </a:moveTo>
-                  <a:lnTo>
-                    <a:pt x="12700" y="4709033"/>
-                  </a:lnTo>
-                  <a:lnTo>
-                    <a:pt x="6350" y="4709033"/>
-                  </a:lnTo>
-                  <a:lnTo>
-                    <a:pt x="12700" y="4709033"/>
-                  </a:lnTo>
-                  <a:cubicBezTo>
-                    <a:pt x="12700" y="4782312"/>
-                    <a:pt x="72136" y="4841621"/>
-                    <a:pt x="145415" y="4841621"/>
-                  </a:cubicBezTo>
-                  <a:lnTo>
-                    <a:pt x="6892925" y="4841621"/>
-                  </a:lnTo>
-                  <a:cubicBezTo>
-                    <a:pt x="6966203" y="4841621"/>
-                    <a:pt x="7025640" y="4782185"/>
-                    <a:pt x="7025640" y="4709033"/>
-                  </a:cubicBezTo>
-                  <a:lnTo>
-                    <a:pt x="7025640" y="145288"/>
-                  </a:lnTo>
-                  <a:cubicBezTo>
-                    <a:pt x="7025640" y="72136"/>
-                    <a:pt x="6966204" y="12700"/>
-                    <a:pt x="6892925" y="12700"/>
-                  </a:cubicBezTo>
-                  <a:lnTo>
-                    <a:pt x="145415" y="12700"/>
-                  </a:lnTo>
-                  <a:lnTo>
-                    <a:pt x="145415" y="6350"/>
-                  </a:lnTo>
-                  <a:lnTo>
-                    <a:pt x="145415" y="12700"/>
-                  </a:lnTo>
-                  <a:cubicBezTo>
-                    <a:pt x="72136" y="12700"/>
-                    <a:pt x="12700" y="72136"/>
-                    <a:pt x="12700" y="145288"/>
-                  </a:cubicBezTo>
-                  <a:close/>
-                </a:path>
-              </a:pathLst>
-            </a:custGeom>
-            <a:solidFill>
-              <a:srgbClr val="C8C9CF"/>
-            </a:solidFill>
-          </p:spPr>
-        </p:sp>
-      </p:grpSp>
-      <p:grpSp>
-        <p:nvGrpSpPr>
-          <p:cNvPr id="14" name="Group 14"/>
-          <p:cNvGrpSpPr/>
-          <p:nvPr/>
-        </p:nvGrpSpPr>
-        <p:grpSpPr>
-          <a:xfrm>
-            <a:off x="6766770" y="2751087"/>
-            <a:ext cx="744141" cy="744141"/>
-            <a:chOff x="0" y="0"/>
-            <a:chExt cx="992188" cy="992188"/>
-          </a:xfrm>
-        </p:grpSpPr>
-        <p:sp>
-          <p:nvSpPr>
-            <p:cNvPr id="15" name="Freeform 15" descr="preencoded.png"/>
-            <p:cNvSpPr/>
-            <p:nvPr/>
-          </p:nvSpPr>
-          <p:spPr>
-            <a:xfrm>
-              <a:off x="0" y="0"/>
-              <a:ext cx="992251" cy="992251"/>
-            </a:xfrm>
-            <a:custGeom>
-              <a:avLst/>
-              <a:gdLst/>
-              <a:ahLst/>
-              <a:cxnLst/>
-              <a:rect l="l" t="t" r="r" b="b"/>
-              <a:pathLst>
-                <a:path w="992251" h="992251">
-                  <a:moveTo>
-                    <a:pt x="0" y="0"/>
-                  </a:moveTo>
-                  <a:lnTo>
-                    <a:pt x="992251" y="0"/>
-                  </a:lnTo>
-                  <a:lnTo>
-                    <a:pt x="992251" y="992251"/>
-                  </a:lnTo>
-                  <a:lnTo>
-                    <a:pt x="0" y="992251"/>
-                  </a:lnTo>
-                  <a:lnTo>
-                    <a:pt x="0" y="0"/>
-                  </a:lnTo>
-                  <a:close/>
-                </a:path>
-              </a:pathLst>
-            </a:custGeom>
-            <a:blipFill>
-              <a:blip r:embed="rId6"/>
-              <a:stretch>
-                <a:fillRect r="6" b="6"/>
-              </a:stretch>
-            </a:blipFill>
-          </p:spPr>
-        </p:sp>
-      </p:grpSp>
-      <p:sp>
-        <p:nvSpPr>
-          <p:cNvPr id="16" name="Freeform 16" descr="preencoded.png"/>
-          <p:cNvSpPr/>
-          <p:nvPr/>
-        </p:nvSpPr>
-        <p:spPr>
-          <a:xfrm>
-            <a:off x="6971405" y="2955579"/>
-            <a:ext cx="334861" cy="334861"/>
-          </a:xfrm>
-          <a:custGeom>
-            <a:avLst/>
-            <a:gdLst/>
-            <a:ahLst/>
-            <a:cxnLst/>
-            <a:rect l="l" t="t" r="r" b="b"/>
-            <a:pathLst>
-              <a:path w="334861" h="334861">
-                <a:moveTo>
-                  <a:pt x="0" y="0"/>
-                </a:moveTo>
-                <a:lnTo>
-                  <a:pt x="334861" y="0"/>
-                </a:lnTo>
-                <a:lnTo>
-                  <a:pt x="334861" y="334861"/>
-                </a:lnTo>
-                <a:lnTo>
-                  <a:pt x="0" y="334861"/>
-                </a:lnTo>
-                <a:lnTo>
-                  <a:pt x="0" y="0"/>
-                </a:lnTo>
-                <a:close/>
-              </a:path>
-            </a:pathLst>
-          </a:custGeom>
-          <a:blipFill>
-            <a:blip r:embed="rId7">
-              <a:extLst>
-                <a:ext uri="{96DAC541-7B7A-43D3-8B79-37D633B846F1}">
-                  <asvg:svgBlip xmlns:asvg="http://schemas.microsoft.com/office/drawing/2016/SVG/main" r:embed="rId8"/>
-                </a:ext>
-              </a:extLst>
-            </a:blip>
-            <a:stretch>
-              <a:fillRect/>
-            </a:stretch>
-          </a:blipFill>
-        </p:spPr>
-      </p:sp>
-      <p:sp>
-        <p:nvSpPr>
-          <p:cNvPr id="17" name="TextBox 17"/>
-          <p:cNvSpPr txBox="1"/>
-          <p:nvPr/>
-        </p:nvSpPr>
-        <p:spPr>
-          <a:xfrm>
-            <a:off x="6766770" y="3733648"/>
-            <a:ext cx="4754318" cy="359714"/>
-          </a:xfrm>
-          <a:prstGeom prst="rect">
-            <a:avLst/>
-          </a:prstGeom>
-        </p:spPr>
-        <p:txBody>
-          <a:bodyPr wrap="square" lIns="0" tIns="0" rIns="0" bIns="0" rtlCol="0" anchor="t">
-            <a:spAutoFit/>
-          </a:bodyPr>
-          <a:lstStyle/>
-          <a:p>
-            <a:pPr algn="l">
-              <a:lnSpc>
-                <a:spcPts val="2999"/>
-              </a:lnSpc>
-            </a:pPr>
-            <a:r>
-              <a:rPr lang="en-US" sz="2437" b="1" dirty="0" err="1">
-                <a:solidFill>
-                  <a:srgbClr val="5B5F71"/>
-                </a:solidFill>
-                <a:latin typeface="Arimo Bold"/>
-                <a:ea typeface="Arimo Bold"/>
-                <a:cs typeface="Arimo Bold"/>
-                <a:sym typeface="Arimo Bold"/>
-              </a:rPr>
-              <a:t>Identificación</a:t>
-            </a:r>
-            <a:r>
-              <a:rPr lang="en-US" sz="2437" b="1" dirty="0">
-                <a:solidFill>
-                  <a:srgbClr val="5B5F71"/>
-                </a:solidFill>
-                <a:latin typeface="Arimo Bold"/>
-                <a:ea typeface="Arimo Bold"/>
-                <a:cs typeface="Arimo Bold"/>
-                <a:sym typeface="Arimo Bold"/>
-              </a:rPr>
-              <a:t> de </a:t>
-            </a:r>
-            <a:r>
-              <a:rPr lang="en-US" sz="2437" b="1" dirty="0" err="1">
-                <a:solidFill>
-                  <a:srgbClr val="5B5F71"/>
-                </a:solidFill>
-                <a:latin typeface="Arimo Bold"/>
-                <a:ea typeface="Arimo Bold"/>
-                <a:cs typeface="Arimo Bold"/>
-                <a:sym typeface="Arimo Bold"/>
-              </a:rPr>
-              <a:t>elementos</a:t>
-            </a:r>
-            <a:endParaRPr lang="en-US" sz="2437" b="1" dirty="0">
-              <a:solidFill>
-                <a:srgbClr val="5B5F71"/>
-              </a:solidFill>
-              <a:latin typeface="Arimo Bold"/>
-              <a:ea typeface="Arimo Bold"/>
-              <a:cs typeface="Arimo Bold"/>
-              <a:sym typeface="Arimo Bold"/>
-            </a:endParaRPr>
-          </a:p>
-        </p:txBody>
-      </p:sp>
-      <p:sp>
-        <p:nvSpPr>
-          <p:cNvPr id="18" name="TextBox 18"/>
-          <p:cNvSpPr txBox="1"/>
-          <p:nvPr/>
-        </p:nvSpPr>
-        <p:spPr>
-          <a:xfrm>
-            <a:off x="6766770" y="4184447"/>
-            <a:ext cx="4754318" cy="1286027"/>
-          </a:xfrm>
-          <a:prstGeom prst="rect">
-            <a:avLst/>
-          </a:prstGeom>
-        </p:spPr>
-        <p:txBody>
-          <a:bodyPr lIns="0" tIns="0" rIns="0" bIns="0" rtlCol="0" anchor="t">
-            <a:spAutoFit/>
-          </a:bodyPr>
-          <a:lstStyle/>
-          <a:p>
-            <a:pPr algn="l">
-              <a:lnSpc>
-                <a:spcPts val="3125"/>
-              </a:lnSpc>
-            </a:pPr>
-            <a:r>
-              <a:rPr lang="en-US" sz="1937">
-                <a:solidFill>
-                  <a:srgbClr val="5B5F71"/>
-                </a:solidFill>
-                <a:latin typeface="Arimo"/>
-                <a:ea typeface="Arimo"/>
-                <a:cs typeface="Arimo"/>
-                <a:sym typeface="Arimo"/>
-              </a:rPr>
-              <a:t>Se dominó la identificación de tokens, lexemas y errores léxicos en diferentes fragmentos de código</a:t>
-            </a:r>
-          </a:p>
-        </p:txBody>
-      </p:sp>
-      <p:grpSp>
-        <p:nvGrpSpPr>
-          <p:cNvPr id="19" name="Group 19"/>
-          <p:cNvGrpSpPr/>
-          <p:nvPr/>
-        </p:nvGrpSpPr>
-        <p:grpSpPr>
-          <a:xfrm>
-            <a:off x="12021741" y="2488854"/>
-            <a:ext cx="5278641" cy="3640779"/>
-            <a:chOff x="0" y="0"/>
-            <a:chExt cx="7038188" cy="4854372"/>
-          </a:xfrm>
-        </p:grpSpPr>
-        <p:sp>
-          <p:nvSpPr>
-            <p:cNvPr id="20" name="Freeform 20"/>
-            <p:cNvSpPr/>
-            <p:nvPr/>
-          </p:nvSpPr>
-          <p:spPr>
-            <a:xfrm>
-              <a:off x="6350" y="6350"/>
-              <a:ext cx="7025513" cy="4841621"/>
-            </a:xfrm>
-            <a:custGeom>
-              <a:avLst/>
-              <a:gdLst/>
-              <a:ahLst/>
-              <a:cxnLst/>
-              <a:rect l="l" t="t" r="r" b="b"/>
-              <a:pathLst>
-                <a:path w="7025513" h="4841621">
-                  <a:moveTo>
-                    <a:pt x="0" y="138938"/>
-                  </a:moveTo>
-                  <a:cubicBezTo>
-                    <a:pt x="0" y="62230"/>
-                    <a:pt x="62230" y="0"/>
-                    <a:pt x="139065" y="0"/>
-                  </a:cubicBezTo>
-                  <a:lnTo>
-                    <a:pt x="6886448" y="0"/>
-                  </a:lnTo>
-                  <a:cubicBezTo>
-                    <a:pt x="6963283" y="0"/>
-                    <a:pt x="7025513" y="62230"/>
-                    <a:pt x="7025513" y="138938"/>
-                  </a:cubicBezTo>
-                  <a:lnTo>
-                    <a:pt x="7025513" y="4702683"/>
-                  </a:lnTo>
-                  <a:cubicBezTo>
-                    <a:pt x="7025513" y="4779391"/>
-                    <a:pt x="6963283" y="4841621"/>
-                    <a:pt x="6886448" y="4841621"/>
-                  </a:cubicBezTo>
-                  <a:lnTo>
-                    <a:pt x="139065" y="4841621"/>
-                  </a:lnTo>
-                  <a:cubicBezTo>
-                    <a:pt x="62230" y="4841621"/>
-                    <a:pt x="0" y="4779518"/>
-                    <a:pt x="0" y="4702683"/>
-                  </a:cubicBezTo>
-                  <a:close/>
-                </a:path>
-              </a:pathLst>
-            </a:custGeom>
-            <a:solidFill>
-              <a:srgbClr val="E2E3E9"/>
-            </a:solidFill>
-          </p:spPr>
-        </p:sp>
-        <p:sp>
-          <p:nvSpPr>
-            <p:cNvPr id="21" name="Freeform 21"/>
-            <p:cNvSpPr/>
-            <p:nvPr/>
-          </p:nvSpPr>
-          <p:spPr>
-            <a:xfrm>
-              <a:off x="0" y="0"/>
-              <a:ext cx="7038213" cy="4854321"/>
-            </a:xfrm>
-            <a:custGeom>
-              <a:avLst/>
-              <a:gdLst/>
-              <a:ahLst/>
-              <a:cxnLst/>
-              <a:rect l="l" t="t" r="r" b="b"/>
-              <a:pathLst>
-                <a:path w="7038213" h="4854321">
-                  <a:moveTo>
-                    <a:pt x="0" y="145288"/>
-                  </a:moveTo>
-                  <a:cubicBezTo>
-                    <a:pt x="0" y="65024"/>
-                    <a:pt x="65151" y="0"/>
-                    <a:pt x="145415" y="0"/>
-                  </a:cubicBezTo>
-                  <a:lnTo>
-                    <a:pt x="6892798" y="0"/>
-                  </a:lnTo>
-                  <a:lnTo>
-                    <a:pt x="6892798" y="6350"/>
-                  </a:lnTo>
-                  <a:lnTo>
-                    <a:pt x="6892798" y="0"/>
-                  </a:lnTo>
-                  <a:cubicBezTo>
-                    <a:pt x="6973062" y="0"/>
-                    <a:pt x="7038213" y="65024"/>
-                    <a:pt x="7038213" y="145288"/>
-                  </a:cubicBezTo>
-                  <a:lnTo>
-                    <a:pt x="7031863" y="145288"/>
-                  </a:lnTo>
-                  <a:lnTo>
-                    <a:pt x="7038213" y="145288"/>
-                  </a:lnTo>
-                  <a:lnTo>
-                    <a:pt x="7038213" y="4709033"/>
-                  </a:lnTo>
-                  <a:lnTo>
-                    <a:pt x="7031863" y="4709033"/>
-                  </a:lnTo>
-                  <a:lnTo>
-                    <a:pt x="7038213" y="4709033"/>
-                  </a:lnTo>
-                  <a:cubicBezTo>
-                    <a:pt x="7038213" y="4789297"/>
-                    <a:pt x="6973062" y="4854321"/>
-                    <a:pt x="6892798" y="4854321"/>
-                  </a:cubicBezTo>
-                  <a:lnTo>
-                    <a:pt x="6892798" y="4847971"/>
-                  </a:lnTo>
-                  <a:lnTo>
-                    <a:pt x="6892798" y="4854321"/>
-                  </a:lnTo>
-                  <a:lnTo>
-                    <a:pt x="145415" y="4854321"/>
-                  </a:lnTo>
-                  <a:lnTo>
-                    <a:pt x="145415" y="4847971"/>
-                  </a:lnTo>
-                  <a:lnTo>
-                    <a:pt x="145415" y="4854321"/>
-                  </a:lnTo>
-                  <a:cubicBezTo>
-                    <a:pt x="65151" y="4854321"/>
-                    <a:pt x="0" y="4789297"/>
-                    <a:pt x="0" y="4709033"/>
-                  </a:cubicBezTo>
-                  <a:lnTo>
-                    <a:pt x="0" y="145288"/>
-                  </a:lnTo>
-                  <a:lnTo>
-                    <a:pt x="6350" y="145288"/>
-                  </a:lnTo>
-                  <a:lnTo>
-                    <a:pt x="0" y="145288"/>
-                  </a:lnTo>
-                  <a:moveTo>
-                    <a:pt x="12700" y="145288"/>
-                  </a:moveTo>
-                  <a:lnTo>
-                    <a:pt x="12700" y="4709033"/>
-                  </a:lnTo>
-                  <a:lnTo>
-                    <a:pt x="6350" y="4709033"/>
-                  </a:lnTo>
-                  <a:lnTo>
-                    <a:pt x="12700" y="4709033"/>
-                  </a:lnTo>
-                  <a:cubicBezTo>
-                    <a:pt x="12700" y="4782312"/>
-                    <a:pt x="72136" y="4841621"/>
-                    <a:pt x="145415" y="4841621"/>
-                  </a:cubicBezTo>
-                  <a:lnTo>
-                    <a:pt x="6892798" y="4841621"/>
-                  </a:lnTo>
-                  <a:cubicBezTo>
-                    <a:pt x="6966077" y="4841621"/>
-                    <a:pt x="7025513" y="4782185"/>
-                    <a:pt x="7025513" y="4709033"/>
-                  </a:cubicBezTo>
-                  <a:lnTo>
-                    <a:pt x="7025513" y="145288"/>
-                  </a:lnTo>
-                  <a:cubicBezTo>
-                    <a:pt x="7025513" y="72136"/>
-                    <a:pt x="6966077" y="12700"/>
-                    <a:pt x="6892798" y="12700"/>
-                  </a:cubicBezTo>
-                  <a:lnTo>
-                    <a:pt x="145415" y="12700"/>
-                  </a:lnTo>
-                  <a:lnTo>
-                    <a:pt x="145415" y="6350"/>
-                  </a:lnTo>
-                  <a:lnTo>
-                    <a:pt x="145415" y="12700"/>
-                  </a:lnTo>
-                  <a:cubicBezTo>
-                    <a:pt x="72136" y="12700"/>
-                    <a:pt x="12700" y="72136"/>
-                    <a:pt x="12700" y="145288"/>
-                  </a:cubicBezTo>
-                  <a:close/>
-                </a:path>
-              </a:pathLst>
-            </a:custGeom>
-            <a:solidFill>
-              <a:srgbClr val="C8C9CF"/>
-            </a:solidFill>
-          </p:spPr>
-        </p:sp>
-      </p:grpSp>
-      <p:grpSp>
-        <p:nvGrpSpPr>
-          <p:cNvPr id="22" name="Group 22"/>
-          <p:cNvGrpSpPr/>
-          <p:nvPr/>
-        </p:nvGrpSpPr>
-        <p:grpSpPr>
-          <a:xfrm>
-            <a:off x="12283973" y="2751087"/>
-            <a:ext cx="744141" cy="744141"/>
-            <a:chOff x="0" y="0"/>
-            <a:chExt cx="992188" cy="992188"/>
-          </a:xfrm>
-        </p:grpSpPr>
-        <p:sp>
-          <p:nvSpPr>
-            <p:cNvPr id="23" name="Freeform 23" descr="preencoded.png"/>
-            <p:cNvSpPr/>
-            <p:nvPr/>
-          </p:nvSpPr>
-          <p:spPr>
-            <a:xfrm>
-              <a:off x="0" y="0"/>
-              <a:ext cx="992251" cy="992251"/>
-            </a:xfrm>
-            <a:custGeom>
-              <a:avLst/>
-              <a:gdLst/>
-              <a:ahLst/>
-              <a:cxnLst/>
-              <a:rect l="l" t="t" r="r" b="b"/>
-              <a:pathLst>
-                <a:path w="992251" h="992251">
-                  <a:moveTo>
-                    <a:pt x="0" y="0"/>
-                  </a:moveTo>
-                  <a:lnTo>
-                    <a:pt x="992251" y="0"/>
-                  </a:lnTo>
-                  <a:lnTo>
-                    <a:pt x="992251" y="992251"/>
-                  </a:lnTo>
-                  <a:lnTo>
-                    <a:pt x="0" y="992251"/>
-                  </a:lnTo>
-                  <a:lnTo>
-                    <a:pt x="0" y="0"/>
-                  </a:lnTo>
-                  <a:close/>
-                </a:path>
-              </a:pathLst>
-            </a:custGeom>
-            <a:blipFill>
-              <a:blip r:embed="rId9"/>
-              <a:stretch>
-                <a:fillRect r="6" b="6"/>
-              </a:stretch>
-            </a:blipFill>
-          </p:spPr>
-        </p:sp>
-      </p:grpSp>
-      <p:sp>
-        <p:nvSpPr>
-          <p:cNvPr id="24" name="Freeform 24" descr="preencoded.png"/>
-          <p:cNvSpPr/>
-          <p:nvPr/>
-        </p:nvSpPr>
-        <p:spPr>
-          <a:xfrm>
-            <a:off x="12488618" y="2955579"/>
-            <a:ext cx="334861" cy="334861"/>
-          </a:xfrm>
-          <a:custGeom>
-            <a:avLst/>
-            <a:gdLst/>
-            <a:ahLst/>
-            <a:cxnLst/>
-            <a:rect l="l" t="t" r="r" b="b"/>
-            <a:pathLst>
-              <a:path w="334861" h="334861">
-                <a:moveTo>
-                  <a:pt x="0" y="0"/>
-                </a:moveTo>
-                <a:lnTo>
-                  <a:pt x="334861" y="0"/>
-                </a:lnTo>
-                <a:lnTo>
-                  <a:pt x="334861" y="334861"/>
-                </a:lnTo>
-                <a:lnTo>
-                  <a:pt x="0" y="334861"/>
-                </a:lnTo>
-                <a:lnTo>
-                  <a:pt x="0" y="0"/>
-                </a:lnTo>
-                <a:close/>
-              </a:path>
-            </a:pathLst>
-          </a:custGeom>
-          <a:blipFill>
-            <a:blip r:embed="rId10">
-              <a:extLst>
-                <a:ext uri="{96DAC541-7B7A-43D3-8B79-37D633B846F1}">
-                  <asvg:svgBlip xmlns:asvg="http://schemas.microsoft.com/office/drawing/2016/SVG/main" r:embed="rId11"/>
-                </a:ext>
-              </a:extLst>
-            </a:blip>
-            <a:stretch>
-              <a:fillRect t="-8334" b="-8334"/>
-            </a:stretch>
-          </a:blipFill>
-        </p:spPr>
-      </p:sp>
-      <p:sp>
-        <p:nvSpPr>
-          <p:cNvPr id="25" name="TextBox 25"/>
-          <p:cNvSpPr txBox="1"/>
-          <p:nvPr/>
-        </p:nvSpPr>
-        <p:spPr>
-          <a:xfrm>
-            <a:off x="12283973" y="3733649"/>
-            <a:ext cx="4327627" cy="359714"/>
-          </a:xfrm>
-          <a:prstGeom prst="rect">
-            <a:avLst/>
-          </a:prstGeom>
-        </p:spPr>
-        <p:txBody>
-          <a:bodyPr wrap="square" lIns="0" tIns="0" rIns="0" bIns="0" rtlCol="0" anchor="t">
-            <a:spAutoFit/>
-          </a:bodyPr>
-          <a:lstStyle/>
-          <a:p>
-            <a:pPr algn="l">
-              <a:lnSpc>
-                <a:spcPts val="2999"/>
-              </a:lnSpc>
-            </a:pPr>
-            <a:r>
-              <a:rPr lang="en-US" sz="2437" b="1" dirty="0" err="1">
-                <a:solidFill>
-                  <a:srgbClr val="5B5F71"/>
-                </a:solidFill>
-                <a:latin typeface="Arimo Bold"/>
-                <a:ea typeface="Arimo Bold"/>
-                <a:cs typeface="Arimo Bold"/>
-                <a:sym typeface="Arimo Bold"/>
-              </a:rPr>
-              <a:t>Importancia</a:t>
-            </a:r>
-            <a:r>
-              <a:rPr lang="en-US" sz="2437" b="1" dirty="0">
-                <a:solidFill>
-                  <a:srgbClr val="5B5F71"/>
-                </a:solidFill>
-                <a:latin typeface="Arimo Bold"/>
-                <a:ea typeface="Arimo Bold"/>
-                <a:cs typeface="Arimo Bold"/>
-                <a:sym typeface="Arimo Bold"/>
-              </a:rPr>
-              <a:t> de las </a:t>
-            </a:r>
-            <a:r>
-              <a:rPr lang="en-US" sz="2437" b="1" dirty="0" err="1">
-                <a:solidFill>
-                  <a:srgbClr val="5B5F71"/>
-                </a:solidFill>
-                <a:latin typeface="Arimo Bold"/>
-                <a:ea typeface="Arimo Bold"/>
-                <a:cs typeface="Arimo Bold"/>
-                <a:sym typeface="Arimo Bold"/>
-              </a:rPr>
-              <a:t>reglas</a:t>
-            </a:r>
-            <a:endParaRPr lang="en-US" sz="2437" b="1" dirty="0">
-              <a:solidFill>
-                <a:srgbClr val="5B5F71"/>
-              </a:solidFill>
-              <a:latin typeface="Arimo Bold"/>
-              <a:ea typeface="Arimo Bold"/>
-              <a:cs typeface="Arimo Bold"/>
-              <a:sym typeface="Arimo Bold"/>
-            </a:endParaRPr>
-          </a:p>
-        </p:txBody>
-      </p:sp>
-      <p:sp>
-        <p:nvSpPr>
-          <p:cNvPr id="26" name="TextBox 26"/>
-          <p:cNvSpPr txBox="1"/>
-          <p:nvPr/>
-        </p:nvSpPr>
-        <p:spPr>
-          <a:xfrm>
-            <a:off x="12283973" y="4184447"/>
-            <a:ext cx="4754166" cy="1286027"/>
-          </a:xfrm>
-          <a:prstGeom prst="rect">
-            <a:avLst/>
-          </a:prstGeom>
-        </p:spPr>
-        <p:txBody>
-          <a:bodyPr lIns="0" tIns="0" rIns="0" bIns="0" rtlCol="0" anchor="t">
-            <a:spAutoFit/>
-          </a:bodyPr>
-          <a:lstStyle/>
-          <a:p>
-            <a:pPr algn="l">
-              <a:lnSpc>
-                <a:spcPts val="3125"/>
-              </a:lnSpc>
-            </a:pPr>
-            <a:r>
-              <a:rPr lang="en-US" sz="1937">
-                <a:solidFill>
-                  <a:srgbClr val="5B5F71"/>
-                </a:solidFill>
-                <a:latin typeface="Arimo"/>
-                <a:ea typeface="Arimo"/>
-                <a:cs typeface="Arimo"/>
-                <a:sym typeface="Arimo"/>
-              </a:rPr>
-              <a:t>Se entendió la importancia de seguir las reglas del lenguaje de programación para evitar errores</a:t>
-            </a:r>
-          </a:p>
-        </p:txBody>
-      </p:sp>
-      <p:sp>
-        <p:nvSpPr>
-          <p:cNvPr id="27" name="TextBox 27"/>
-          <p:cNvSpPr txBox="1"/>
-          <p:nvPr/>
-        </p:nvSpPr>
-        <p:spPr>
-          <a:xfrm>
-            <a:off x="992238" y="6308674"/>
-            <a:ext cx="16303523" cy="1286027"/>
-          </a:xfrm>
-          <a:prstGeom prst="rect">
-            <a:avLst/>
-          </a:prstGeom>
-        </p:spPr>
-        <p:txBody>
-          <a:bodyPr lIns="0" tIns="0" rIns="0" bIns="0" rtlCol="0" anchor="t">
-            <a:spAutoFit/>
-          </a:bodyPr>
-          <a:lstStyle/>
-          <a:p>
-            <a:pPr algn="l">
-              <a:lnSpc>
-                <a:spcPts val="3125"/>
-              </a:lnSpc>
-            </a:pPr>
-            <a:r>
-              <a:rPr lang="en-US" sz="1937">
-                <a:solidFill>
-                  <a:srgbClr val="5B5F71"/>
-                </a:solidFill>
-                <a:latin typeface="Arimo"/>
-                <a:ea typeface="Arimo"/>
-                <a:cs typeface="Arimo"/>
-                <a:sym typeface="Arimo"/>
-              </a:rPr>
-              <a:t>La realización de estos ejercicios permitió comprender de manera más clara cómo funciona el análisis léxico dentro del proceso de compilación. A través de la identificación práctica de tokens, lexemas y errores léxicos, fue posible observar cómo el compilador interpreta cada elemento del código fuente.</a:t>
-            </a:r>
-          </a:p>
-        </p:txBody>
-      </p:sp>
-      <p:sp>
-        <p:nvSpPr>
-          <p:cNvPr id="28" name="TextBox 28"/>
-          <p:cNvSpPr txBox="1"/>
-          <p:nvPr/>
-        </p:nvSpPr>
-        <p:spPr>
-          <a:xfrm>
-            <a:off x="992238" y="7778506"/>
-            <a:ext cx="16303523" cy="1286027"/>
-          </a:xfrm>
-          <a:prstGeom prst="rect">
-            <a:avLst/>
-          </a:prstGeom>
-        </p:spPr>
-        <p:txBody>
-          <a:bodyPr lIns="0" tIns="0" rIns="0" bIns="0" rtlCol="0" anchor="t">
-            <a:spAutoFit/>
-          </a:bodyPr>
-          <a:lstStyle/>
-          <a:p>
-            <a:pPr algn="l">
-              <a:lnSpc>
-                <a:spcPts val="3125"/>
-              </a:lnSpc>
-            </a:pPr>
-            <a:r>
-              <a:rPr lang="en-US" sz="1937">
-                <a:solidFill>
-                  <a:srgbClr val="5B5F71"/>
-                </a:solidFill>
-                <a:latin typeface="Arimo"/>
-                <a:ea typeface="Arimo"/>
-                <a:cs typeface="Arimo"/>
-                <a:sym typeface="Arimo"/>
-              </a:rPr>
-              <a:t>Además, estos ejercicios ayudan a entender la importancia de seguir las reglas del lenguaje de programación, ya que cualquier error léxico puede provocar que el código no sea interpretado correctamente. Esta actividad permitió reforzar los conceptos teóricos mediante ejemplos prácticos que muestran el funcionamiento básico del análisis léxico.</a:t>
-            </a:r>
+            <a:r>
+              <a:rPr lang="es-MX" sz="2800" dirty="0">
+                <a:hlinkClick r:id="rId3"/>
+              </a:rPr>
+              <a:t>https://github.com/amaurycolochos-cpu/LENGUAJES-Y-AUTOMATAS-1/tree/main/UNIDAD%204/AnalizadorLexicoFX</a:t>
+            </a:r>
+            <a:endParaRPr lang="es-MX" sz="2800" dirty="0"/>
+          </a:p>
+          <a:p>
+            <a:endParaRPr lang="es-MX" sz="2800" dirty="0"/>
           </a:p>
         </p:txBody>
       </p:sp>
     </p:spTree>
+    <p:extLst>
+      <p:ext uri="{BB962C8B-B14F-4D97-AF65-F5344CB8AC3E}">
+        <p14:creationId xmlns:p14="http://schemas.microsoft.com/office/powerpoint/2010/main" val="2189507563"/>
+      </p:ext>
+    </p:extLst>
   </p:cSld>
   <p:clrMapOvr>
     <a:masterClrMapping/>
